--- a/lecons/F2T/06_FORM2TECH_LESSON2_WEEK8_Tropical_Grassland_Climate.pptx
+++ b/lecons/F2T/06_FORM2TECH_LESSON2_WEEK8_Tropical_Grassland_Climate.pptx
@@ -59,10 +59,9 @@
     <p:sldId id="307" r:id="rId53"/>
     <p:sldId id="308" r:id="rId54"/>
     <p:sldId id="309" r:id="rId55"/>
-    <p:sldId id="310" r:id="rId56"/>
   </p:sldIdLst>
   <p:notesMasterIdLst>
-    <p:notesMasterId r:id="rId57"/>
+    <p:notesMasterId r:id="rId56"/>
   </p:notesMasterIdLst>
   <p:sldSz cx="12192000" cy="6858000"/>
   <p:notesSz cx="6858000" cy="12192000"/>
@@ -732,7 +731,7 @@
           <a:p>
             <a:r>
               <a:rPr lang="en-US" dirty="0"/>
-              <a:t>Listen carefully to this situation from real life. In March, Moussa's father plants maize near Garoua. After a few weeks, the young plants dry up and die. His neighbour plants in June, and his maize grows well. Think about it, because I am going to ask you some questions.</a:t>
+              <a:t>Listen carefully to this situation from real life. In March, Moussa's father plants maize near Garoua. After a few weeks, the young plants dry up and die, but his neighbour plants in June and his maize grows well. Moussa asks: "Why is June a good time to plant in Garoua, but not March?" Think about it, because I am going to ask you some questions.</a:t>
             </a:r>
             <a:endParaRPr lang="en-US" dirty="0"/>
           </a:p>
@@ -908,7 +907,7 @@
           <a:p>
             <a:r>
               <a:rPr lang="en-US" dirty="0"/>
-              <a:t>Good. The maize of Moussa's father died.</a:t>
+              <a:t>Good. Moussa does not know when the rainy season comes in Garoua and why.</a:t>
             </a:r>
             <a:endParaRPr lang="en-US" dirty="0"/>
           </a:p>
@@ -996,7 +995,7 @@
           <a:p>
             <a:r>
               <a:rPr lang="en-US" dirty="0"/>
-              <a:t>Question 2: Why did it die? Think for a moment, then raise your hand to answer.</a:t>
+              <a:t>Question 2: What happened to the maize planted in March? Think for a moment, then raise your hand to answer.</a:t>
             </a:r>
             <a:endParaRPr lang="en-US" dirty="0"/>
           </a:p>
@@ -1084,7 +1083,7 @@
           <a:p>
             <a:r>
               <a:rPr lang="en-US" dirty="0"/>
-              <a:t>Good. He planted in March, in the dry season. There was no rain.</a:t>
+              <a:t>Good. It dried up and died.</a:t>
             </a:r>
             <a:endParaRPr lang="en-US" dirty="0"/>
           </a:p>
@@ -1172,7 +1171,7 @@
           <a:p>
             <a:r>
               <a:rPr lang="en-US" dirty="0"/>
-              <a:t>Question 3: When should he plant? Think for a moment, then raise your hand to answer.</a:t>
+              <a:t>Question 3: Why did the maize planted in June grow well? Think for a moment, then raise your hand to answer.</a:t>
             </a:r>
             <a:endParaRPr lang="en-US" dirty="0"/>
           </a:p>
@@ -1260,7 +1259,7 @@
           <a:p>
             <a:r>
               <a:rPr lang="en-US" dirty="0"/>
-              <a:t>Good. He should plant when the rains start, in May or June.</a:t>
+              <a:t>Good. It was planted in the rainy season.</a:t>
             </a:r>
             <a:endParaRPr lang="en-US" dirty="0"/>
           </a:p>
@@ -1612,7 +1611,7 @@
           <a:p>
             <a:r>
               <a:rPr lang="en-US" dirty="0"/>
-              <a:t>Activity 1. Look carefully at this picture: the savanna: tall grass and trees far apart. Observe every detail before I ask the question.</a:t>
+              <a:t>Activity 1. Look carefully at this picture: grass with scattered trees. Observe every detail before I ask the question.</a:t>
             </a:r>
             <a:endParaRPr lang="en-US" dirty="0"/>
           </a:p>
@@ -1700,7 +1699,7 @@
           <a:p>
             <a:r>
               <a:rPr lang="en-US" dirty="0"/>
-              <a:t>Here is the question for Activity 1: Describe the plants in the picture. What do we call this region? Take one minute to think and write your answer in your rough notebook.</a:t>
+              <a:t>Here is the question for Activity 1: What do we call this region of tall grass and scattered trees? Take one minute to think and write your answer in your rough notebook.</a:t>
             </a:r>
             <a:endParaRPr lang="en-US" dirty="0"/>
           </a:p>
@@ -1788,7 +1787,7 @@
           <a:p>
             <a:r>
               <a:rPr lang="en-US" dirty="0"/>
-              <a:t>Let us check the answer together. Tall grass and trees far apart. It is the savanna, or Tropical Grassland.</a:t>
+              <a:t>Let us check the answer together. The savanna, or Tropical Grassland.</a:t>
             </a:r>
             <a:endParaRPr lang="en-US" dirty="0"/>
           </a:p>
@@ -1876,7 +1875,7 @@
           <a:p>
             <a:r>
               <a:rPr lang="en-US" dirty="0"/>
-              <a:t>Activity 2. Look carefully at this diagram: the savanna regions of Africa. Observe every detail before I ask the question.</a:t>
+              <a:t>Activity 2. Look carefully at this diagram: the savanna in Africa. Observe every detail before I ask the question.</a:t>
             </a:r>
             <a:endParaRPr lang="en-US" dirty="0"/>
           </a:p>
@@ -2140,7 +2139,7 @@
           <a:p>
             <a:r>
               <a:rPr lang="en-US" dirty="0"/>
-              <a:t>Activity 3. Look carefully at this diagram: the climate of Garoua: rain (blue bars) and temperature (red line). Observe every detail before I ask the question.</a:t>
+              <a:t>Activity 3. Look carefully at this diagram: the climate of Garoua. Observe every detail before I ask the question.</a:t>
             </a:r>
             <a:endParaRPr lang="en-US" dirty="0"/>
           </a:p>
@@ -2228,7 +2227,7 @@
           <a:p>
             <a:r>
               <a:rPr lang="en-US" dirty="0"/>
-              <a:t>Here is the question for Activity 3: Which months are wet in Garoua? Which months are dry? Take one minute to think and write your answer in your rough notebook.</a:t>
+              <a:t>Here is the question for Activity 3: Which months are wet in Garoua? Take one minute to think and write your answer in your rough notebook.</a:t>
             </a:r>
             <a:endParaRPr lang="en-US" dirty="0"/>
           </a:p>
@@ -2316,7 +2315,7 @@
           <a:p>
             <a:r>
               <a:rPr lang="en-US" dirty="0"/>
-              <a:t>Let us check the answer together. Wet: May to October. Dry: November to April.</a:t>
+              <a:t>Let us check the answer together. From May to October.</a:t>
             </a:r>
             <a:endParaRPr lang="en-US" dirty="0"/>
           </a:p>
@@ -2404,7 +2403,7 @@
           <a:p>
             <a:r>
               <a:rPr lang="en-US" dirty="0"/>
-              <a:t>Activity 4. Look carefully at this picture: a dusty sky in the dry season. Observe every detail before I ask the question.</a:t>
+              <a:t>Activity 4. Look carefully at this picture: a dusty sky. Observe every detail before I ask the question.</a:t>
             </a:r>
             <a:endParaRPr lang="en-US" dirty="0"/>
           </a:p>
@@ -2580,7 +2579,7 @@
           <a:p>
             <a:r>
               <a:rPr lang="en-US" dirty="0"/>
-              <a:t>Here is the question for Activity 4: Which dry, dusty wind makes the sky grey in the dry season? Take one minute to think and write your answer in your rough notebook.</a:t>
+              <a:t>Here is the question for Activity 4: Which dry, dusty wind blows in the dry season? Take one minute to think and write your answer in your rough notebook.</a:t>
             </a:r>
             <a:endParaRPr lang="en-US" dirty="0"/>
           </a:p>
@@ -2668,7 +2667,7 @@
           <a:p>
             <a:r>
               <a:rPr lang="en-US" dirty="0"/>
-              <a:t>Let us check the answer together. The Harmattan. It comes from the Sahara Desert.</a:t>
+              <a:t>Let us check the answer together. The Harmattan.</a:t>
             </a:r>
             <a:endParaRPr lang="en-US" dirty="0"/>
           </a:p>
@@ -2756,7 +2755,7 @@
           <a:p>
             <a:r>
               <a:rPr lang="en-US" dirty="0"/>
-              <a:t>Activity 5. Look carefully at this picture: a big storm cloud in the rainy season. Observe every detail before I ask the question.</a:t>
+              <a:t>Activity 5. Look carefully at this picture: a storm. Observe every detail before I ask the question.</a:t>
             </a:r>
             <a:endParaRPr lang="en-US" dirty="0"/>
           </a:p>
@@ -2844,7 +2843,7 @@
           <a:p>
             <a:r>
               <a:rPr lang="en-US" dirty="0"/>
-              <a:t>Here is the question for Activity 5: How does the rain fall in the savanna in the wet season? Take one minute to think and write your answer in your rough notebook.</a:t>
+              <a:t>Here is the question for Activity 5: How does rain fall in the savanna in the wet season? Take one minute to think and write your answer in your rough notebook.</a:t>
             </a:r>
             <a:endParaRPr lang="en-US" dirty="0"/>
           </a:p>
@@ -2932,7 +2931,7 @@
           <a:p>
             <a:r>
               <a:rPr lang="en-US" dirty="0"/>
-              <a:t>Let us check the answer together. It falls as heavy storms with thunder, usually in the afternoon.</a:t>
+              <a:t>Let us check the answer together. As heavy storms with thunder.</a:t>
             </a:r>
             <a:endParaRPr lang="en-US" dirty="0"/>
           </a:p>
@@ -3108,7 +3107,7 @@
           <a:p>
             <a:r>
               <a:rPr lang="en-US" dirty="0"/>
-              <a:t>Let us copy Meaning. The tropical grassland is defined as follows. On this slide we have Savanna. Write each point on a new line, with the key term first, and explain it in your own words when we revise.</a:t>
+              <a:t>Let us copy the definitions. The key terms of this lesson are defined as follows. On this slide we have Tropical Grassland (savanna). Write each point on a new line, with the key term first, and explain it in your own words when we revise.</a:t>
             </a:r>
             <a:endParaRPr lang="en-US" dirty="0"/>
           </a:p>
@@ -3196,7 +3195,7 @@
           <a:p>
             <a:r>
               <a:rPr lang="en-US" dirty="0"/>
-              <a:t>Let us copy Location. The savanna lies between about 5° and 15° north and south of the Equator. On this slide we have Africa. Write each point on a new line, with the key term first, and explain it in your own words when we revise. When you finish, we go to the next slide.</a:t>
+              <a:t>Let us copy Location. The savanna lies between 5° and 15° N and S of the Equator. Copy the point on Africa on the left, then draw the diagram on the right: the savanna in Africa. Give it a title and label it clearly.</a:t>
             </a:r>
             <a:endParaRPr lang="en-US" dirty="0"/>
           </a:p>
@@ -3372,7 +3371,7 @@
           <a:p>
             <a:r>
               <a:rPr lang="en-US" dirty="0"/>
-              <a:t>Now draw this illustration in your notebook: the savanna in Africa. Give it a title and label it clearly.</a:t>
+              <a:t>Let us copy Characteristics of the Climate. The savanna climate has the following characteristics. Copy the point on Hot all year on the left, then draw the diagram on the right: the climate of Garoua. Give it a title and label it clearly.</a:t>
             </a:r>
             <a:endParaRPr lang="en-US" dirty="0"/>
           </a:p>
@@ -3548,7 +3547,7 @@
           <a:p>
             <a:r>
               <a:rPr lang="en-US" dirty="0"/>
-              <a:t>Let us copy Characteristics of the Climate. The climate of the savanna has the following characteristics. On this slide we have Temperature and Seasons. Write each point on a new line, with the key term first, and explain it in your own words when we revise. When you finish, we go to the next slide.</a:t>
+              <a:t>We continue with Characteristics of the Climate. On this slide we have Two seasons, Rainfall and Storms. Write each point on a new line, with the key term first, and explain it in your own words when we revise.</a:t>
             </a:r>
             <a:endParaRPr lang="en-US" dirty="0"/>
           </a:p>
@@ -3636,7 +3635,7 @@
           <a:p>
             <a:r>
               <a:rPr lang="en-US" dirty="0"/>
-              <a:t>We continue with Characteristics of the Climate. On this slide we have Rainfall and Winds. Write each point on a new line, with the key term first, and explain it in your own words when we revise.</a:t>
+              <a:t>Copy the point on Harmattan on the left, then draw the diagram on the right: harmattan dust. Give it a title and label it clearly.</a:t>
             </a:r>
             <a:endParaRPr lang="en-US" dirty="0"/>
           </a:p>
@@ -4780,7 +4779,7 @@
           <a:p>
             <a:r>
               <a:rPr lang="en-US" dirty="0"/>
-              <a:t>Take your time to copy this part; we will continue together.</a:t>
+              <a:t>This slide is for me, the teacher: it gives the timing of the lesson and what to do if the projector is not available.</a:t>
             </a:r>
             <a:endParaRPr lang="en-US" dirty="0"/>
           </a:p>
@@ -4868,7 +4867,7 @@
           <a:p>
             <a:r>
               <a:rPr lang="en-US" dirty="0"/>
-              <a:t>This slide is for me, the teacher: it gives the timing of the lesson and what to do if the projector is not available.</a:t>
+              <a:t>These are the references and picture credits used to prepare this lesson.</a:t>
             </a:r>
             <a:endParaRPr lang="en-US" dirty="0"/>
           </a:p>
@@ -4892,94 +4891,6 @@
             <a:fld id="{F7021451-1387-4CA6-816F-3879F97B5CBC}" type="slidenum">
               <a:rPr lang="en-US"/>
               <a:t>54</a:t>
-            </a:fld>
-            <a:endParaRPr lang="en-US"/>
-          </a:p>
-        </p:txBody>
-      </p:sp>
-    </p:spTree>
-    <p:extLst>
-      <p:ext uri="{BB962C8B-B14F-4D97-AF65-F5344CB8AC3E}">
-        <p14:creationId xmlns:p14="http://schemas.microsoft.com/office/powerpoint/2010/main" val="1024086991"/>
-      </p:ext>
-    </p:extLst>
-  </p:cSld>
-  <p:clrMapOvr>
-    <a:masterClrMapping/>
-  </p:clrMapOvr>
-</p:notes>
-</file>
-
-<file path=ppt/notesSlides/notesSlide55.xml><?xml version="1.0" encoding="utf-8"?>
-<p:notes xmlns:a="http://schemas.openxmlformats.org/drawingml/2006/main" xmlns:r="http://schemas.openxmlformats.org/officeDocument/2006/relationships" xmlns:p="http://schemas.openxmlformats.org/presentationml/2006/main">
-  <p:cSld>
-    <p:spTree>
-      <p:nvGrpSpPr>
-        <p:cNvPr id="1" name=""/>
-        <p:cNvGrpSpPr/>
-        <p:nvPr/>
-      </p:nvGrpSpPr>
-      <p:grpSpPr>
-        <a:xfrm>
-          <a:off x="0" y="0"/>
-          <a:ext cx="0" cy="0"/>
-          <a:chOff x="0" y="0"/>
-          <a:chExt cx="0" cy="0"/>
-        </a:xfrm>
-      </p:grpSpPr>
-      <p:sp>
-        <p:nvSpPr>
-          <p:cNvPr id="2" name="Slide Image Placeholder 1"/>
-          <p:cNvSpPr>
-            <a:spLocks noGrp="1" noRot="1" noChangeAspect="1"/>
-          </p:cNvSpPr>
-          <p:nvPr>
-            <p:ph type="sldImg"/>
-          </p:nvPr>
-        </p:nvSpPr>
-        <p:spPr/>
-      </p:sp>
-      <p:sp>
-        <p:nvSpPr>
-          <p:cNvPr id="3" name="Notes Placeholder 2"/>
-          <p:cNvSpPr>
-            <a:spLocks noGrp="1"/>
-          </p:cNvSpPr>
-          <p:nvPr>
-            <p:ph type="body" idx="1"/>
-          </p:nvPr>
-        </p:nvSpPr>
-        <p:spPr/>
-        <p:txBody>
-          <a:bodyPr/>
-          <a:lstStyle/>
-          <a:p>
-            <a:r>
-              <a:rPr lang="en-US" dirty="0"/>
-              <a:t>These are the references and picture credits used to prepare this lesson.</a:t>
-            </a:r>
-            <a:endParaRPr lang="en-US" dirty="0"/>
-          </a:p>
-        </p:txBody>
-      </p:sp>
-      <p:sp>
-        <p:nvSpPr>
-          <p:cNvPr id="4" name="Slide Number Placeholder 3"/>
-          <p:cNvSpPr>
-            <a:spLocks noGrp="1"/>
-          </p:cNvSpPr>
-          <p:nvPr>
-            <p:ph type="sldNum" sz="quarter" idx="10"/>
-          </p:nvPr>
-        </p:nvSpPr>
-        <p:spPr/>
-        <p:txBody>
-          <a:bodyPr/>
-          <a:lstStyle/>
-          <a:p>
-            <a:fld id="{F7021451-1387-4CA6-816F-3879F97B5CBC}" type="slidenum">
-              <a:rPr lang="en-US"/>
-              <a:t>55</a:t>
             </a:fld>
             <a:endParaRPr lang="en-US"/>
           </a:p>
@@ -6908,7 +6819,7 @@
         <p:spPr>
           <a:xfrm>
             <a:off x="0" y="658368"/>
-            <a:ext cx="5120640" cy="5833872"/>
+            <a:ext cx="2468880" cy="5833872"/>
           </a:xfrm>
           <a:prstGeom prst="rect">
             <a:avLst/>
@@ -6923,8 +6834,8 @@
         </p:nvSpPr>
         <p:spPr>
           <a:xfrm>
-            <a:off x="5349240" y="1005840"/>
-            <a:ext cx="6522415" cy="731520"/>
+            <a:off x="2697480" y="1005840"/>
+            <a:ext cx="9174175" cy="731520"/>
           </a:xfrm>
           <a:prstGeom prst="rect">
             <a:avLst/>
@@ -6964,8 +6875,8 @@
         </p:nvSpPr>
         <p:spPr>
           <a:xfrm>
-            <a:off x="5349240" y="1783080"/>
-            <a:ext cx="6522415" cy="4663440"/>
+            <a:off x="2697480" y="1783080"/>
+            <a:ext cx="9174175" cy="4663440"/>
           </a:xfrm>
           <a:prstGeom prst="rect">
             <a:avLst/>
@@ -6992,7 +6903,7 @@
                 <a:ea typeface="Times New Roman" pitchFamily="34" charset="-122"/>
                 <a:cs typeface="Times New Roman" pitchFamily="34" charset="-120"/>
               </a:rPr>
-              <a:t>In March, Moussa's father plants maize near Garoua. After a few weeks, the young plants dry up and die. His neighbour plants in June, and his maize grows well.</a:t>
+              <a:t>In March, Moussa's father plants maize near Garoua. After a few weeks, the young plants dry up and die, but his neighbour plants in June and his maize grows well. Moussa asks: "Why is June a good time to plant in Garoua, but not March?"</a:t>
             </a:r>
             <a:endParaRPr lang="en-US" sz="4000" dirty="0"/>
           </a:p>
@@ -7430,7 +7341,7 @@
                 <a:ea typeface="Times New Roman" pitchFamily="34" charset="-122"/>
                 <a:cs typeface="Times New Roman" pitchFamily="34" charset="-120"/>
               </a:rPr>
-              <a:t>The maize of Moussa's father died.</a:t>
+              <a:t>Moussa does not know when the rainy season comes in Garoua and why.</a:t>
             </a:r>
             <a:endParaRPr lang="en-US" sz="4000" dirty="0"/>
           </a:p>
@@ -7649,7 +7560,7 @@
                 <a:ea typeface="Times New Roman" pitchFamily="34" charset="-122"/>
                 <a:cs typeface="Times New Roman" pitchFamily="34" charset="-120"/>
               </a:rPr>
-              <a:t>Why did it die?</a:t>
+              <a:t>What happened to the maize planted in March?</a:t>
             </a:r>
             <a:endParaRPr lang="en-US" sz="4000" dirty="0"/>
           </a:p>
@@ -7868,7 +7779,7 @@
                 <a:ea typeface="Times New Roman" pitchFamily="34" charset="-122"/>
                 <a:cs typeface="Times New Roman" pitchFamily="34" charset="-120"/>
               </a:rPr>
-              <a:t>He planted in March, in the dry season. There was no rain.</a:t>
+              <a:t>It dried up and died.</a:t>
             </a:r>
             <a:endParaRPr lang="en-US" sz="4000" dirty="0"/>
           </a:p>
@@ -8087,7 +7998,7 @@
                 <a:ea typeface="Times New Roman" pitchFamily="34" charset="-122"/>
                 <a:cs typeface="Times New Roman" pitchFamily="34" charset="-120"/>
               </a:rPr>
-              <a:t>When should he plant?</a:t>
+              <a:t>Why did the maize planted in June grow well?</a:t>
             </a:r>
             <a:endParaRPr lang="en-US" sz="4000" dirty="0"/>
           </a:p>
@@ -8306,7 +8217,7 @@
                 <a:ea typeface="Times New Roman" pitchFamily="34" charset="-122"/>
                 <a:cs typeface="Times New Roman" pitchFamily="34" charset="-120"/>
               </a:rPr>
-              <a:t>He should plant when the rains start, in May or June.</a:t>
+              <a:t>It was planted in the rainy season.</a:t>
             </a:r>
             <a:endParaRPr lang="en-US" sz="4000" dirty="0"/>
           </a:p>
@@ -9451,7 +9362,7 @@
                 <a:ea typeface="Calibri" pitchFamily="34" charset="-122"/>
                 <a:cs typeface="Calibri" pitchFamily="34" charset="-120"/>
               </a:rPr>
-              <a:t>1. MEANING AND LOCATION</a:t>
+              <a:t>1. LOCATION</a:t>
             </a:r>
             <a:endParaRPr lang="en-US" sz="1400" dirty="0"/>
           </a:p>
@@ -9553,7 +9464,7 @@
                 <a:ea typeface="Times New Roman" pitchFamily="34" charset="-122"/>
                 <a:cs typeface="Times New Roman" pitchFamily="34" charset="-120"/>
               </a:rPr>
-              <a:t>The savanna: tall grass and trees far apart.</a:t>
+              <a:t>Grass with scattered trees.</a:t>
             </a:r>
             <a:endParaRPr lang="en-US" sz="1800" dirty="0"/>
           </a:p>
@@ -9665,7 +9576,7 @@
                 <a:ea typeface="Calibri" pitchFamily="34" charset="-122"/>
                 <a:cs typeface="Calibri" pitchFamily="34" charset="-120"/>
               </a:rPr>
-              <a:t>1. MEANING AND LOCATION</a:t>
+              <a:t>1. LOCATION</a:t>
             </a:r>
             <a:endParaRPr lang="en-US" sz="1400" dirty="0"/>
           </a:p>
@@ -9772,7 +9683,7 @@
                 <a:ea typeface="Times New Roman" pitchFamily="34" charset="-122"/>
                 <a:cs typeface="Times New Roman" pitchFamily="34" charset="-120"/>
               </a:rPr>
-              <a:t>Describe the plants in the picture. What do we call this region?</a:t>
+              <a:t>What do we call this region of tall grass and scattered trees?</a:t>
             </a:r>
             <a:endParaRPr lang="en-US" sz="4000" dirty="0"/>
           </a:p>
@@ -9884,7 +9795,7 @@
                 <a:ea typeface="Calibri" pitchFamily="34" charset="-122"/>
                 <a:cs typeface="Calibri" pitchFamily="34" charset="-120"/>
               </a:rPr>
-              <a:t>1. MEANING AND LOCATION</a:t>
+              <a:t>1. LOCATION</a:t>
             </a:r>
             <a:endParaRPr lang="en-US" sz="1400" dirty="0"/>
           </a:p>
@@ -9991,7 +9902,7 @@
                 <a:ea typeface="Times New Roman" pitchFamily="34" charset="-122"/>
                 <a:cs typeface="Times New Roman" pitchFamily="34" charset="-120"/>
               </a:rPr>
-              <a:t>Tall grass and trees far apart. It is the savanna, or Tropical Grassland.</a:t>
+              <a:t>The savanna, or Tropical Grassland.</a:t>
             </a:r>
             <a:endParaRPr lang="en-US" sz="4000" dirty="0"/>
           </a:p>
@@ -10103,7 +10014,7 @@
                 <a:ea typeface="Calibri" pitchFamily="34" charset="-122"/>
                 <a:cs typeface="Calibri" pitchFamily="34" charset="-120"/>
               </a:rPr>
-              <a:t>1. MEANING AND LOCATION</a:t>
+              <a:t>1. LOCATION</a:t>
             </a:r>
             <a:endParaRPr lang="en-US" sz="1400" dirty="0"/>
           </a:p>
@@ -10205,7 +10116,7 @@
                 <a:ea typeface="Times New Roman" pitchFamily="34" charset="-122"/>
                 <a:cs typeface="Times New Roman" pitchFamily="34" charset="-120"/>
               </a:rPr>
-              <a:t>The savanna regions of Africa.</a:t>
+              <a:t>The savanna in Africa.</a:t>
             </a:r>
             <a:endParaRPr lang="en-US" sz="1800" dirty="0"/>
           </a:p>
@@ -10317,7 +10228,7 @@
                 <a:ea typeface="Calibri" pitchFamily="34" charset="-122"/>
                 <a:cs typeface="Calibri" pitchFamily="34" charset="-120"/>
               </a:rPr>
-              <a:t>1. MEANING AND LOCATION</a:t>
+              <a:t>1. LOCATION</a:t>
             </a:r>
             <a:endParaRPr lang="en-US" sz="1400" dirty="0"/>
           </a:p>
@@ -10536,7 +10447,7 @@
                 <a:ea typeface="Calibri" pitchFamily="34" charset="-122"/>
                 <a:cs typeface="Calibri" pitchFamily="34" charset="-120"/>
               </a:rPr>
-              <a:t>1. MEANING AND LOCATION</a:t>
+              <a:t>1. LOCATION</a:t>
             </a:r>
             <a:endParaRPr lang="en-US" sz="1400" dirty="0"/>
           </a:p>
@@ -10857,7 +10768,7 @@
                 <a:ea typeface="Times New Roman" pitchFamily="34" charset="-122"/>
                 <a:cs typeface="Times New Roman" pitchFamily="34" charset="-120"/>
               </a:rPr>
-              <a:t>The climate of Garoua: rain (blue bars) and temperature (red line).</a:t>
+              <a:t>The climate of Garoua.</a:t>
             </a:r>
             <a:endParaRPr lang="en-US" sz="1800" dirty="0"/>
           </a:p>
@@ -11076,7 +10987,7 @@
                 <a:ea typeface="Times New Roman" pitchFamily="34" charset="-122"/>
                 <a:cs typeface="Times New Roman" pitchFamily="34" charset="-120"/>
               </a:rPr>
-              <a:t>Which months are wet in Garoua? Which months are dry?</a:t>
+              <a:t>Which months are wet in Garoua?</a:t>
             </a:r>
             <a:endParaRPr lang="en-US" sz="4000" dirty="0"/>
           </a:p>
@@ -11295,7 +11206,7 @@
                 <a:ea typeface="Times New Roman" pitchFamily="34" charset="-122"/>
                 <a:cs typeface="Times New Roman" pitchFamily="34" charset="-120"/>
               </a:rPr>
-              <a:t>Wet: May to October. Dry: November to April.</a:t>
+              <a:t>From May to October.</a:t>
             </a:r>
             <a:endParaRPr lang="en-US" sz="4000" dirty="0"/>
           </a:p>
@@ -11509,7 +11420,7 @@
                 <a:ea typeface="Times New Roman" pitchFamily="34" charset="-122"/>
                 <a:cs typeface="Times New Roman" pitchFamily="34" charset="-120"/>
               </a:rPr>
-              <a:t>A dusty sky in the dry season.</a:t>
+              <a:t>A dusty sky.</a:t>
             </a:r>
             <a:endParaRPr lang="en-US" sz="1800" dirty="0"/>
           </a:p>
@@ -12737,7 +12648,7 @@
                 <a:ea typeface="Times New Roman" pitchFamily="34" charset="-122"/>
                 <a:cs typeface="Times New Roman" pitchFamily="34" charset="-120"/>
               </a:rPr>
-              <a:t>Which dry, dusty wind makes the sky grey in the dry season?</a:t>
+              <a:t>Which dry, dusty wind blows in the dry season?</a:t>
             </a:r>
             <a:endParaRPr lang="en-US" sz="4000" dirty="0"/>
           </a:p>
@@ -12956,7 +12867,7 @@
                 <a:ea typeface="Times New Roman" pitchFamily="34" charset="-122"/>
                 <a:cs typeface="Times New Roman" pitchFamily="34" charset="-120"/>
               </a:rPr>
-              <a:t>The Harmattan. It comes from the Sahara Desert.</a:t>
+              <a:t>The Harmattan.</a:t>
             </a:r>
             <a:endParaRPr lang="en-US" sz="4000" dirty="0"/>
           </a:p>
@@ -13170,7 +13081,7 @@
                 <a:ea typeface="Times New Roman" pitchFamily="34" charset="-122"/>
                 <a:cs typeface="Times New Roman" pitchFamily="34" charset="-120"/>
               </a:rPr>
-              <a:t>A big storm cloud in the rainy season.</a:t>
+              <a:t>A storm.</a:t>
             </a:r>
             <a:endParaRPr lang="en-US" sz="1800" dirty="0"/>
           </a:p>
@@ -13389,7 +13300,7 @@
                 <a:ea typeface="Times New Roman" pitchFamily="34" charset="-122"/>
                 <a:cs typeface="Times New Roman" pitchFamily="34" charset="-120"/>
               </a:rPr>
-              <a:t>How does the rain fall in the savanna in the wet season?</a:t>
+              <a:t>How does rain fall in the savanna in the wet season?</a:t>
             </a:r>
             <a:endParaRPr lang="en-US" sz="4000" dirty="0"/>
           </a:p>
@@ -13608,7 +13519,7 @@
                 <a:ea typeface="Times New Roman" pitchFamily="34" charset="-122"/>
                 <a:cs typeface="Times New Roman" pitchFamily="34" charset="-120"/>
               </a:rPr>
-              <a:t>It falls as heavy storms with thunder, usually in the afternoon.</a:t>
+              <a:t>As heavy storms with thunder.</a:t>
             </a:r>
             <a:endParaRPr lang="en-US" sz="4000" dirty="0"/>
           </a:p>
@@ -13819,7 +13730,7 @@
               <a:buNone/>
             </a:pPr>
             <a:r>
-              <a:rPr lang="en-US" sz="4000" b="1" dirty="0">
+              <a:rPr lang="en-US" sz="3200" b="1" dirty="0">
                 <a:solidFill>
                   <a:srgbClr val="111111"/>
                 </a:solidFill>
@@ -13829,7 +13740,7 @@
               </a:rPr>
               <a:t>Topic: Man in His Environment</a:t>
             </a:r>
-            <a:endParaRPr lang="en-US" sz="4000" dirty="0"/>
+            <a:endParaRPr lang="en-US" sz="3200" dirty="0"/>
           </a:p>
           <a:p>
             <a:pPr algn="l" indent="0" marL="0">
@@ -13839,7 +13750,7 @@
               <a:buNone/>
             </a:pPr>
             <a:r>
-              <a:rPr lang="en-US" sz="4000" b="1" dirty="0">
+              <a:rPr lang="en-US" sz="3200" b="1" dirty="0">
                 <a:solidFill>
                   <a:srgbClr val="111111"/>
                 </a:solidFill>
@@ -13849,7 +13760,7 @@
               </a:rPr>
               <a:t>Sub-topic: Natural Regions</a:t>
             </a:r>
-            <a:endParaRPr lang="en-US" sz="4000" dirty="0"/>
+            <a:endParaRPr lang="en-US" sz="3200" dirty="0"/>
           </a:p>
           <a:p>
             <a:pPr algn="l" indent="0" marL="0">
@@ -13859,7 +13770,7 @@
               <a:buNone/>
             </a:pPr>
             <a:r>
-              <a:rPr lang="en-US" sz="4000" b="1" dirty="0">
+              <a:rPr lang="en-US" sz="3200" b="1" dirty="0">
                 <a:solidFill>
                   <a:srgbClr val="990011"/>
                 </a:solidFill>
@@ -13869,7 +13780,7 @@
               </a:rPr>
               <a:t>Lesson 2 (Part 1): The Tropical Grassland Region: Location and Characteristics (Climate)</a:t>
             </a:r>
-            <a:endParaRPr lang="en-US" sz="4000" dirty="0"/>
+            <a:endParaRPr lang="en-US" sz="3200" dirty="0"/>
           </a:p>
         </p:txBody>
       </p:sp>
@@ -14044,7 +13955,7 @@
                 <a:ea typeface="Times New Roman" pitchFamily="34" charset="-122"/>
                 <a:cs typeface="Times New Roman" pitchFamily="34" charset="-120"/>
               </a:rPr>
-              <a:t>1. Meaning and Location</a:t>
+              <a:t>DEFINITIONS</a:t>
             </a:r>
             <a:endParaRPr lang="en-US" sz="3600" dirty="0"/>
           </a:p>
@@ -14058,47 +13969,8 @@
         </p:nvSpPr>
         <p:spPr>
           <a:xfrm>
-            <a:off x="5349240" y="1737360"/>
-            <a:ext cx="6522415" cy="457200"/>
-          </a:xfrm>
-          <a:prstGeom prst="rect">
-            <a:avLst/>
-          </a:prstGeom>
-          <a:noFill/>
-          <a:ln/>
-        </p:spPr>
-        <p:txBody>
-          <a:bodyPr wrap="square" lIns="0" tIns="0" rIns="0" bIns="0" rtlCol="0" anchor="ctr"/>
-          <a:lstStyle/>
-          <a:p>
-            <a:pPr algn="l" indent="0" marL="0">
-              <a:buNone/>
-            </a:pPr>
-            <a:r>
-              <a:rPr lang="en-US" sz="3200" b="1" dirty="0">
-                <a:solidFill>
-                  <a:srgbClr val="990011"/>
-                </a:solidFill>
-                <a:latin typeface="Times New Roman" pitchFamily="34" charset="0"/>
-                <a:ea typeface="Times New Roman" pitchFamily="34" charset="-122"/>
-                <a:cs typeface="Times New Roman" pitchFamily="34" charset="-120"/>
-              </a:rPr>
-              <a:t>A) Meaning</a:t>
-            </a:r>
-            <a:endParaRPr lang="en-US" sz="3200" dirty="0"/>
-          </a:p>
-        </p:txBody>
-      </p:sp>
-      <p:sp>
-        <p:nvSpPr>
-          <p:cNvPr id="6" name="Text 3"/>
-          <p:cNvSpPr/>
-          <p:nvPr/>
-        </p:nvSpPr>
-        <p:spPr>
-          <a:xfrm>
-            <a:off x="5349240" y="2240280"/>
-            <a:ext cx="6522415" cy="4206240"/>
+            <a:off x="5349240" y="1783080"/>
+            <a:ext cx="6522415" cy="4663440"/>
           </a:xfrm>
           <a:prstGeom prst="rect">
             <a:avLst/>
@@ -14125,16 +13997,17 @@
                 <a:ea typeface="Times New Roman" pitchFamily="34" charset="-122"/>
                 <a:cs typeface="Times New Roman" pitchFamily="34" charset="-120"/>
               </a:rPr>
-              <a:t>The tropical grassland is defined as follows:</a:t>
+              <a:t>The key terms of this lesson are defined as follows:</a:t>
             </a:r>
             <a:endParaRPr lang="en-US" sz="4000" dirty="0"/>
           </a:p>
           <a:p>
-            <a:pPr algn="l" indent="0" marL="0">
+            <a:pPr algn="l" marL="342900" indent="-342900">
               <a:spcAft>
                 <a:spcPts val="800"/>
               </a:spcAft>
-              <a:buNone/>
+              <a:buSzPct val="100000"/>
+              <a:buChar char="•"/>
             </a:pPr>
             <a:r>
               <a:rPr lang="en-US" sz="4000" b="1" dirty="0">
@@ -14145,13 +14018,14 @@
                 <a:ea typeface="Times New Roman" pitchFamily="34" charset="-122"/>
                 <a:cs typeface="Times New Roman" pitchFamily="34" charset="-120"/>
               </a:rPr>
-              <a:t>Savanna: </a:t>
-            </a:r>
-            <a:pPr algn="l" indent="0" marL="0">
+              <a:t>Tropical Grassland (savanna): </a:t>
+            </a:r>
+            <a:pPr algn="l" marL="342900" indent="-342900">
               <a:spcAft>
                 <a:spcPts val="800"/>
               </a:spcAft>
-              <a:buNone/>
+              <a:buSzPct val="100000"/>
+              <a:buChar char="•"/>
             </a:pPr>
             <a:r>
               <a:rPr lang="en-US" sz="4000" dirty="0">
@@ -14162,7 +14036,7 @@
                 <a:ea typeface="Times New Roman" pitchFamily="34" charset="-122"/>
                 <a:cs typeface="Times New Roman" pitchFamily="34" charset="-120"/>
               </a:rPr>
-              <a:t>It is a region of tall grass with trees far apart, found between the forest and the desert.</a:t>
+              <a:t>It is the region of grass and scattered trees with a wet and a dry season.</a:t>
             </a:r>
             <a:endParaRPr lang="en-US" sz="4000" dirty="0"/>
           </a:p>
@@ -14280,9 +14154,131 @@
           </a:p>
         </p:txBody>
       </p:sp>
+      <p:sp>
+        <p:nvSpPr>
+          <p:cNvPr id="3" name="Text 1"/>
+          <p:cNvSpPr/>
+          <p:nvPr/>
+        </p:nvSpPr>
+        <p:spPr>
+          <a:xfrm>
+            <a:off x="365760" y="1005840"/>
+            <a:ext cx="11460175" cy="731520"/>
+          </a:xfrm>
+          <a:prstGeom prst="rect">
+            <a:avLst/>
+          </a:prstGeom>
+          <a:noFill/>
+          <a:ln/>
+        </p:spPr>
+        <p:txBody>
+          <a:bodyPr wrap="square" lIns="0" tIns="0" rIns="0" bIns="0" rtlCol="0" anchor="ctr">
+            <a:normAutofit/>
+          </a:bodyPr>
+          <a:lstStyle/>
+          <a:p>
+            <a:pPr algn="ctr" indent="0" marL="0">
+              <a:buNone/>
+            </a:pPr>
+            <a:r>
+              <a:rPr lang="en-US" sz="3600" b="1" dirty="0">
+                <a:solidFill>
+                  <a:srgbClr val="990011"/>
+                </a:solidFill>
+                <a:latin typeface="Times New Roman" pitchFamily="34" charset="0"/>
+                <a:ea typeface="Times New Roman" pitchFamily="34" charset="-122"/>
+                <a:cs typeface="Times New Roman" pitchFamily="34" charset="-120"/>
+              </a:rPr>
+              <a:t>1. Location</a:t>
+            </a:r>
+            <a:endParaRPr lang="en-US" sz="3600" dirty="0"/>
+          </a:p>
+        </p:txBody>
+      </p:sp>
+      <p:sp>
+        <p:nvSpPr>
+          <p:cNvPr id="4" name="Text 2"/>
+          <p:cNvSpPr/>
+          <p:nvPr/>
+        </p:nvSpPr>
+        <p:spPr>
+          <a:xfrm>
+            <a:off x="365760" y="1783080"/>
+            <a:ext cx="4846320" cy="4617720"/>
+          </a:xfrm>
+          <a:prstGeom prst="rect">
+            <a:avLst/>
+          </a:prstGeom>
+          <a:noFill/>
+          <a:ln/>
+        </p:spPr>
+        <p:txBody>
+          <a:bodyPr wrap="square" lIns="0" tIns="0" rIns="0" bIns="0" rtlCol="0" anchor="t"/>
+          <a:lstStyle/>
+          <a:p>
+            <a:pPr algn="l" indent="0" marL="0">
+              <a:spcAft>
+                <a:spcPts val="800"/>
+              </a:spcAft>
+              <a:buNone/>
+            </a:pPr>
+            <a:r>
+              <a:rPr lang="en-US" sz="3600" i="1" dirty="0">
+                <a:solidFill>
+                  <a:srgbClr val="111111"/>
+                </a:solidFill>
+                <a:latin typeface="Times New Roman" pitchFamily="34" charset="0"/>
+                <a:ea typeface="Times New Roman" pitchFamily="34" charset="-122"/>
+                <a:cs typeface="Times New Roman" pitchFamily="34" charset="-120"/>
+              </a:rPr>
+              <a:t>The savanna lies between 5° and 15° N and S of the Equator:</a:t>
+            </a:r>
+            <a:endParaRPr lang="en-US" sz="3600" dirty="0"/>
+          </a:p>
+          <a:p>
+            <a:pPr algn="l" marL="342900" indent="-342900">
+              <a:spcAft>
+                <a:spcPts val="800"/>
+              </a:spcAft>
+              <a:buSzPct val="100000"/>
+              <a:buChar char="•"/>
+            </a:pPr>
+            <a:r>
+              <a:rPr lang="en-US" sz="3600" b="1" dirty="0">
+                <a:solidFill>
+                  <a:srgbClr val="111111"/>
+                </a:solidFill>
+                <a:latin typeface="Times New Roman" pitchFamily="34" charset="0"/>
+                <a:ea typeface="Times New Roman" pitchFamily="34" charset="-122"/>
+                <a:cs typeface="Times New Roman" pitchFamily="34" charset="-120"/>
+              </a:rPr>
+              <a:t>Africa: </a:t>
+            </a:r>
+            <a:pPr algn="l" marL="342900" indent="-342900">
+              <a:spcAft>
+                <a:spcPts val="800"/>
+              </a:spcAft>
+              <a:buSzPct val="100000"/>
+              <a:buChar char="•"/>
+            </a:pPr>
+            <a:r>
+              <a:rPr lang="en-US" sz="3600" dirty="0">
+                <a:solidFill>
+                  <a:srgbClr val="111111"/>
+                </a:solidFill>
+                <a:latin typeface="Times New Roman" pitchFamily="34" charset="0"/>
+                <a:ea typeface="Times New Roman" pitchFamily="34" charset="-122"/>
+                <a:cs typeface="Times New Roman" pitchFamily="34" charset="-120"/>
+              </a:rPr>
+              <a:t>North Cameroon, the Sudan savanna and East Africa.</a:t>
+            </a:r>
+            <a:endParaRPr lang="en-US" sz="3600" dirty="0"/>
+          </a:p>
+        </p:txBody>
+      </p:sp>
       <p:pic>
         <p:nvPicPr>
-          <p:cNvPr id="3" name="Image 0" descr="/home/claude/f4/img/minesec_sheet.png">    </p:cNvPr>
+          <p:cNvPr id="5" name="Image 0" descr="/home/claude/f4/img/v2/savanna_africa_big.png">    </p:cNvPr>
           <p:cNvPicPr>
             <a:picLocks noChangeAspect="1"/>
           </p:cNvPicPr>
@@ -14296,8 +14292,8 @@
         </p:blipFill>
         <p:spPr>
           <a:xfrm>
-            <a:off x="0" y="658368"/>
-            <a:ext cx="3840480" cy="5833872"/>
+            <a:off x="5349240" y="2097226"/>
+            <a:ext cx="6659575" cy="3641955"/>
           </a:xfrm>
           <a:prstGeom prst="rect">
             <a:avLst/>
@@ -14306,14 +14302,14 @@
       </p:pic>
       <p:sp>
         <p:nvSpPr>
-          <p:cNvPr id="4" name="Text 1"/>
+          <p:cNvPr id="6" name="Text 3"/>
           <p:cNvSpPr/>
           <p:nvPr/>
         </p:nvSpPr>
         <p:spPr>
           <a:xfrm>
-            <a:off x="4069080" y="1005840"/>
-            <a:ext cx="7802575" cy="731520"/>
+            <a:off x="5349240" y="6089904"/>
+            <a:ext cx="6659575" cy="347472"/>
           </a:xfrm>
           <a:prstGeom prst="rect">
             <a:avLst/>
@@ -14322,144 +14318,24 @@
           <a:ln/>
         </p:spPr>
         <p:txBody>
-          <a:bodyPr wrap="square" lIns="0" tIns="0" rIns="0" bIns="0" rtlCol="0" anchor="ctr">
-            <a:normAutofit/>
-          </a:bodyPr>
+          <a:bodyPr wrap="square" lIns="0" tIns="0" rIns="0" bIns="0" rtlCol="0" anchor="ctr"/>
           <a:lstStyle/>
           <a:p>
             <a:pPr algn="ctr" indent="0" marL="0">
               <a:buNone/>
             </a:pPr>
             <a:r>
-              <a:rPr lang="en-US" sz="3600" b="1" dirty="0">
-                <a:solidFill>
-                  <a:srgbClr val="990011"/>
+              <a:rPr lang="en-US" sz="1600" i="1" dirty="0">
+                <a:solidFill>
+                  <a:srgbClr val="555555"/>
                 </a:solidFill>
                 <a:latin typeface="Times New Roman" pitchFamily="34" charset="0"/>
                 <a:ea typeface="Times New Roman" pitchFamily="34" charset="-122"/>
                 <a:cs typeface="Times New Roman" pitchFamily="34" charset="-120"/>
               </a:rPr>
-              <a:t>1. Meaning and Location</a:t>
-            </a:r>
-            <a:endParaRPr lang="en-US" sz="3600" dirty="0"/>
-          </a:p>
-        </p:txBody>
-      </p:sp>
-      <p:sp>
-        <p:nvSpPr>
-          <p:cNvPr id="5" name="Text 2"/>
-          <p:cNvSpPr/>
-          <p:nvPr/>
-        </p:nvSpPr>
-        <p:spPr>
-          <a:xfrm>
-            <a:off x="4069080" y="1737360"/>
-            <a:ext cx="7802575" cy="457200"/>
-          </a:xfrm>
-          <a:prstGeom prst="rect">
-            <a:avLst/>
-          </a:prstGeom>
-          <a:noFill/>
-          <a:ln/>
-        </p:spPr>
-        <p:txBody>
-          <a:bodyPr wrap="square" lIns="0" tIns="0" rIns="0" bIns="0" rtlCol="0" anchor="ctr"/>
-          <a:lstStyle/>
-          <a:p>
-            <a:pPr algn="l" indent="0" marL="0">
-              <a:buNone/>
-            </a:pPr>
-            <a:r>
-              <a:rPr lang="en-US" sz="3200" b="1" dirty="0">
-                <a:solidFill>
-                  <a:srgbClr val="990011"/>
-                </a:solidFill>
-                <a:latin typeface="Times New Roman" pitchFamily="34" charset="0"/>
-                <a:ea typeface="Times New Roman" pitchFamily="34" charset="-122"/>
-                <a:cs typeface="Times New Roman" pitchFamily="34" charset="-120"/>
-              </a:rPr>
-              <a:t>B) Location</a:t>
-            </a:r>
-            <a:endParaRPr lang="en-US" sz="3200" dirty="0"/>
-          </a:p>
-        </p:txBody>
-      </p:sp>
-      <p:sp>
-        <p:nvSpPr>
-          <p:cNvPr id="6" name="Text 3"/>
-          <p:cNvSpPr/>
-          <p:nvPr/>
-        </p:nvSpPr>
-        <p:spPr>
-          <a:xfrm>
-            <a:off x="4069080" y="2240280"/>
-            <a:ext cx="7802575" cy="4206240"/>
-          </a:xfrm>
-          <a:prstGeom prst="rect">
-            <a:avLst/>
-          </a:prstGeom>
-          <a:noFill/>
-          <a:ln/>
-        </p:spPr>
-        <p:txBody>
-          <a:bodyPr wrap="square" lIns="0" tIns="0" rIns="0" bIns="0" rtlCol="0" anchor="t"/>
-          <a:lstStyle/>
-          <a:p>
-            <a:pPr algn="l" indent="0" marL="0">
-              <a:spcAft>
-                <a:spcPts val="800"/>
-              </a:spcAft>
-              <a:buNone/>
-            </a:pPr>
-            <a:r>
-              <a:rPr lang="en-US" sz="4000" i="1" dirty="0">
-                <a:solidFill>
-                  <a:srgbClr val="111111"/>
-                </a:solidFill>
-                <a:latin typeface="Times New Roman" pitchFamily="34" charset="0"/>
-                <a:ea typeface="Times New Roman" pitchFamily="34" charset="-122"/>
-                <a:cs typeface="Times New Roman" pitchFamily="34" charset="-120"/>
-              </a:rPr>
-              <a:t>The savanna lies between about 5° and 15° north and south of the Equator:</a:t>
-            </a:r>
-            <a:endParaRPr lang="en-US" sz="4000" dirty="0"/>
-          </a:p>
-          <a:p>
-            <a:pPr algn="l" indent="0" marL="0">
-              <a:spcAft>
-                <a:spcPts val="800"/>
-              </a:spcAft>
-              <a:buNone/>
-            </a:pPr>
-            <a:r>
-              <a:rPr lang="en-US" sz="4000" b="1" dirty="0">
-                <a:solidFill>
-                  <a:srgbClr val="111111"/>
-                </a:solidFill>
-                <a:latin typeface="Times New Roman" pitchFamily="34" charset="0"/>
-                <a:ea typeface="Times New Roman" pitchFamily="34" charset="-122"/>
-                <a:cs typeface="Times New Roman" pitchFamily="34" charset="-120"/>
-              </a:rPr>
-              <a:t>Africa: </a:t>
-            </a:r>
-            <a:pPr algn="l" indent="0" marL="0">
-              <a:spcAft>
-                <a:spcPts val="800"/>
-              </a:spcAft>
-              <a:buNone/>
-            </a:pPr>
-            <a:r>
-              <a:rPr lang="en-US" sz="4000" dirty="0">
-                <a:solidFill>
-                  <a:srgbClr val="111111"/>
-                </a:solidFill>
-                <a:latin typeface="Times New Roman" pitchFamily="34" charset="0"/>
-                <a:ea typeface="Times New Roman" pitchFamily="34" charset="-122"/>
-                <a:cs typeface="Times New Roman" pitchFamily="34" charset="-120"/>
-              </a:rPr>
-              <a:t>It covers West Africa including North Cameroon, East Africa and Southern Africa.</a:t>
-            </a:r>
-            <a:endParaRPr lang="en-US" sz="4000" dirty="0"/>
+              <a:t>Illustration: the savanna in Africa</a:t>
+            </a:r>
+            <a:endParaRPr lang="en-US" sz="1600" dirty="0"/>
           </a:p>
         </p:txBody>
       </p:sp>
@@ -14634,7 +14510,7 @@
                 <a:ea typeface="Times New Roman" pitchFamily="34" charset="-122"/>
                 <a:cs typeface="Times New Roman" pitchFamily="34" charset="-120"/>
               </a:rPr>
-              <a:t>1. Meaning and Location</a:t>
+              <a:t>1. Location</a:t>
             </a:r>
             <a:endParaRPr lang="en-US" sz="3600" dirty="0"/>
           </a:p>
@@ -14648,8 +14524,8 @@
         </p:nvSpPr>
         <p:spPr>
           <a:xfrm>
-            <a:off x="5349240" y="1737360"/>
-            <a:ext cx="6522415" cy="457200"/>
+            <a:off x="5349240" y="1783080"/>
+            <a:ext cx="6522415" cy="4663440"/>
           </a:xfrm>
           <a:prstGeom prst="rect">
             <a:avLst/>
@@ -14658,53 +14534,15 @@
           <a:ln/>
         </p:spPr>
         <p:txBody>
-          <a:bodyPr wrap="square" lIns="0" tIns="0" rIns="0" bIns="0" rtlCol="0" anchor="ctr"/>
-          <a:lstStyle/>
-          <a:p>
-            <a:pPr algn="l" indent="0" marL="0">
-              <a:buNone/>
-            </a:pPr>
-            <a:r>
-              <a:rPr lang="en-US" sz="3200" b="1" dirty="0">
-                <a:solidFill>
-                  <a:srgbClr val="990011"/>
-                </a:solidFill>
-                <a:latin typeface="Times New Roman" pitchFamily="34" charset="0"/>
-                <a:ea typeface="Times New Roman" pitchFamily="34" charset="-122"/>
-                <a:cs typeface="Times New Roman" pitchFamily="34" charset="-120"/>
-              </a:rPr>
-              <a:t>B) Location (continued)</a:t>
-            </a:r>
-            <a:endParaRPr lang="en-US" sz="3200" dirty="0"/>
-          </a:p>
-        </p:txBody>
-      </p:sp>
-      <p:sp>
-        <p:nvSpPr>
-          <p:cNvPr id="6" name="Text 3"/>
-          <p:cNvSpPr/>
-          <p:nvPr/>
-        </p:nvSpPr>
-        <p:spPr>
-          <a:xfrm>
-            <a:off x="5349240" y="2240280"/>
-            <a:ext cx="6522415" cy="4206240"/>
-          </a:xfrm>
-          <a:prstGeom prst="rect">
-            <a:avLst/>
-          </a:prstGeom>
-          <a:noFill/>
-          <a:ln/>
-        </p:spPr>
-        <p:txBody>
           <a:bodyPr wrap="square" lIns="0" tIns="0" rIns="0" bIns="0" rtlCol="0" anchor="t"/>
           <a:lstStyle/>
           <a:p>
-            <a:pPr algn="l" indent="0" marL="0">
+            <a:pPr algn="l" marL="342900" indent="-342900">
               <a:spcAft>
                 <a:spcPts val="800"/>
               </a:spcAft>
-              <a:buNone/>
+              <a:buSzPct val="100000"/>
+              <a:buChar char="•"/>
             </a:pPr>
             <a:r>
               <a:rPr lang="en-US" sz="4000" b="1" dirty="0">
@@ -14717,11 +14555,12 @@
               </a:rPr>
               <a:t>South America: </a:t>
             </a:r>
-            <a:pPr algn="l" indent="0" marL="0">
+            <a:pPr algn="l" marL="342900" indent="-342900">
               <a:spcAft>
                 <a:spcPts val="800"/>
               </a:spcAft>
-              <a:buNone/>
+              <a:buSzPct val="100000"/>
+              <a:buChar char="•"/>
             </a:pPr>
             <a:r>
               <a:rPr lang="en-US" sz="4000" dirty="0">
@@ -14732,16 +14571,17 @@
                 <a:ea typeface="Times New Roman" pitchFamily="34" charset="-122"/>
                 <a:cs typeface="Times New Roman" pitchFamily="34" charset="-120"/>
               </a:rPr>
-              <a:t>It is found in the Llanos of Venezuela and the Campos of Brazil.</a:t>
+              <a:t>The Llanos and the Campos.</a:t>
             </a:r>
             <a:endParaRPr lang="en-US" sz="4000" dirty="0"/>
           </a:p>
           <a:p>
-            <a:pPr algn="l" indent="0" marL="0">
+            <a:pPr algn="l" marL="342900" indent="-342900">
               <a:spcAft>
                 <a:spcPts val="800"/>
               </a:spcAft>
-              <a:buNone/>
+              <a:buSzPct val="100000"/>
+              <a:buChar char="•"/>
             </a:pPr>
             <a:r>
               <a:rPr lang="en-US" sz="4000" b="1" dirty="0">
@@ -14754,11 +14594,12 @@
               </a:rPr>
               <a:t>Australia: </a:t>
             </a:r>
-            <a:pPr algn="l" indent="0" marL="0">
+            <a:pPr algn="l" marL="342900" indent="-342900">
               <a:spcAft>
                 <a:spcPts val="800"/>
               </a:spcAft>
-              <a:buNone/>
+              <a:buSzPct val="100000"/>
+              <a:buChar char="•"/>
             </a:pPr>
             <a:r>
               <a:rPr lang="en-US" sz="4000" dirty="0">
@@ -14769,7 +14610,7 @@
                 <a:ea typeface="Times New Roman" pitchFamily="34" charset="-122"/>
                 <a:cs typeface="Times New Roman" pitchFamily="34" charset="-120"/>
               </a:rPr>
-              <a:t>It is found in the north of Australia.</a:t>
+              <a:t>The north of Australia.</a:t>
             </a:r>
             <a:endParaRPr lang="en-US" sz="4000" dirty="0"/>
           </a:p>
@@ -14895,8 +14736,8 @@
         </p:nvSpPr>
         <p:spPr>
           <a:xfrm>
-            <a:off x="457200" y="1005840"/>
-            <a:ext cx="11277295" cy="731520"/>
+            <a:off x="365760" y="1005840"/>
+            <a:ext cx="11460175" cy="731520"/>
           </a:xfrm>
           <a:prstGeom prst="rect">
             <a:avLst/>
@@ -14905,7 +14746,9 @@
           <a:ln/>
         </p:spPr>
         <p:txBody>
-          <a:bodyPr wrap="square" lIns="0" tIns="0" rIns="0" bIns="0" rtlCol="0" anchor="ctr"/>
+          <a:bodyPr wrap="square" lIns="0" tIns="0" rIns="0" bIns="0" rtlCol="0" anchor="ctr">
+            <a:normAutofit/>
+          </a:bodyPr>
           <a:lstStyle/>
           <a:p>
             <a:pPr algn="ctr" indent="0" marL="0">
@@ -14920,7 +14763,88 @@
                 <a:ea typeface="Times New Roman" pitchFamily="34" charset="-122"/>
                 <a:cs typeface="Times New Roman" pitchFamily="34" charset="-120"/>
               </a:rPr>
-              <a:t>1. Meaning and Location</a:t>
+              <a:t>2. Characteristics of the Climate</a:t>
+            </a:r>
+            <a:endParaRPr lang="en-US" sz="3600" dirty="0"/>
+          </a:p>
+        </p:txBody>
+      </p:sp>
+      <p:sp>
+        <p:nvSpPr>
+          <p:cNvPr id="4" name="Text 2"/>
+          <p:cNvSpPr/>
+          <p:nvPr/>
+        </p:nvSpPr>
+        <p:spPr>
+          <a:xfrm>
+            <a:off x="365760" y="1783080"/>
+            <a:ext cx="4846320" cy="4617720"/>
+          </a:xfrm>
+          <a:prstGeom prst="rect">
+            <a:avLst/>
+          </a:prstGeom>
+          <a:noFill/>
+          <a:ln/>
+        </p:spPr>
+        <p:txBody>
+          <a:bodyPr wrap="square" lIns="0" tIns="0" rIns="0" bIns="0" rtlCol="0" anchor="t"/>
+          <a:lstStyle/>
+          <a:p>
+            <a:pPr algn="l" indent="0" marL="0">
+              <a:spcAft>
+                <a:spcPts val="800"/>
+              </a:spcAft>
+              <a:buNone/>
+            </a:pPr>
+            <a:r>
+              <a:rPr lang="en-US" sz="3600" i="1" dirty="0">
+                <a:solidFill>
+                  <a:srgbClr val="111111"/>
+                </a:solidFill>
+                <a:latin typeface="Times New Roman" pitchFamily="34" charset="0"/>
+                <a:ea typeface="Times New Roman" pitchFamily="34" charset="-122"/>
+                <a:cs typeface="Times New Roman" pitchFamily="34" charset="-120"/>
+              </a:rPr>
+              <a:t>The savanna climate has the following characteristics:</a:t>
+            </a:r>
+            <a:endParaRPr lang="en-US" sz="3600" dirty="0"/>
+          </a:p>
+          <a:p>
+            <a:pPr algn="l" marL="342900" indent="-342900">
+              <a:spcAft>
+                <a:spcPts val="800"/>
+              </a:spcAft>
+              <a:buSzPct val="100000"/>
+              <a:buChar char="•"/>
+            </a:pPr>
+            <a:r>
+              <a:rPr lang="en-US" sz="3600" b="1" dirty="0">
+                <a:solidFill>
+                  <a:srgbClr val="111111"/>
+                </a:solidFill>
+                <a:latin typeface="Times New Roman" pitchFamily="34" charset="0"/>
+                <a:ea typeface="Times New Roman" pitchFamily="34" charset="-122"/>
+                <a:cs typeface="Times New Roman" pitchFamily="34" charset="-120"/>
+              </a:rPr>
+              <a:t>Hot all year: </a:t>
+            </a:r>
+            <a:pPr algn="l" marL="342900" indent="-342900">
+              <a:spcAft>
+                <a:spcPts val="800"/>
+              </a:spcAft>
+              <a:buSzPct val="100000"/>
+              <a:buChar char="•"/>
+            </a:pPr>
+            <a:r>
+              <a:rPr lang="en-US" sz="3600" dirty="0">
+                <a:solidFill>
+                  <a:srgbClr val="111111"/>
+                </a:solidFill>
+                <a:latin typeface="Times New Roman" pitchFamily="34" charset="0"/>
+                <a:ea typeface="Times New Roman" pitchFamily="34" charset="-122"/>
+                <a:cs typeface="Times New Roman" pitchFamily="34" charset="-120"/>
+              </a:rPr>
+              <a:t>Temperatures are between 25 and 35 °C.</a:t>
             </a:r>
             <a:endParaRPr lang="en-US" sz="3600" dirty="0"/>
           </a:p>
@@ -14928,7 +14852,7 @@
       </p:sp>
       <p:pic>
         <p:nvPicPr>
-          <p:cNvPr id="4" name="Image 0" descr="/home/claude/f4/img/v2/savanna_africa_big.png">    </p:cNvPr>
+          <p:cNvPr id="5" name="Image 0" descr="/home/claude/f4/img/v2/garoua_climate_big.png">    </p:cNvPr>
           <p:cNvPicPr>
             <a:picLocks noChangeAspect="1"/>
           </p:cNvPicPr>
@@ -14942,8 +14866,8 @@
         </p:blipFill>
         <p:spPr>
           <a:xfrm>
-            <a:off x="2191621" y="1783080"/>
-            <a:ext cx="7808453" cy="4270248"/>
+            <a:off x="5349240" y="2461422"/>
+            <a:ext cx="6659575" cy="2913564"/>
           </a:xfrm>
           <a:prstGeom prst="rect">
             <a:avLst/>
@@ -14952,14 +14876,14 @@
       </p:pic>
       <p:sp>
         <p:nvSpPr>
-          <p:cNvPr id="5" name="Text 2"/>
+          <p:cNvPr id="6" name="Text 3"/>
           <p:cNvSpPr/>
           <p:nvPr/>
         </p:nvSpPr>
         <p:spPr>
           <a:xfrm>
-            <a:off x="457200" y="6089904"/>
-            <a:ext cx="11277295" cy="347472"/>
+            <a:off x="5349240" y="6089904"/>
+            <a:ext cx="6659575" cy="347472"/>
           </a:xfrm>
           <a:prstGeom prst="rect">
             <a:avLst/>
@@ -14975,7 +14899,7 @@
               <a:buNone/>
             </a:pPr>
             <a:r>
-              <a:rPr lang="en-US" sz="1800" i="1" dirty="0">
+              <a:rPr lang="en-US" sz="1600" i="1" dirty="0">
                 <a:solidFill>
                   <a:srgbClr val="555555"/>
                 </a:solidFill>
@@ -14983,9 +14907,9 @@
                 <a:ea typeface="Times New Roman" pitchFamily="34" charset="-122"/>
                 <a:cs typeface="Times New Roman" pitchFamily="34" charset="-120"/>
               </a:rPr>
-              <a:t>Illustration: the savanna in Africa</a:t>
-            </a:r>
-            <a:endParaRPr lang="en-US" sz="1800" dirty="0"/>
+              <a:t>Illustration: the climate of Garoua</a:t>
+            </a:r>
+            <a:endParaRPr lang="en-US" sz="1600" dirty="0"/>
           </a:p>
         </p:txBody>
       </p:sp>
@@ -15357,7 +15281,7 @@
         <p:spPr>
           <a:xfrm>
             <a:off x="0" y="658368"/>
-            <a:ext cx="3840480" cy="5833872"/>
+            <a:ext cx="5120640" cy="5833872"/>
           </a:xfrm>
           <a:prstGeom prst="rect">
             <a:avLst/>
@@ -15372,8 +15296,8 @@
         </p:nvSpPr>
         <p:spPr>
           <a:xfrm>
-            <a:off x="4069080" y="1005840"/>
-            <a:ext cx="7802575" cy="731520"/>
+            <a:off x="5349240" y="1005840"/>
+            <a:ext cx="6522415" cy="731520"/>
           </a:xfrm>
           <a:prstGeom prst="rect">
             <a:avLst/>
@@ -15413,8 +15337,8 @@
         </p:nvSpPr>
         <p:spPr>
           <a:xfrm>
-            <a:off x="4069080" y="1783080"/>
-            <a:ext cx="7802575" cy="4663440"/>
+            <a:off x="5349240" y="1783080"/>
+            <a:ext cx="6522415" cy="4663440"/>
           </a:xfrm>
           <a:prstGeom prst="rect">
             <a:avLst/>
@@ -15426,14 +15350,15 @@
           <a:bodyPr wrap="square" lIns="0" tIns="0" rIns="0" bIns="0" rtlCol="0" anchor="t"/>
           <a:lstStyle/>
           <a:p>
-            <a:pPr algn="l" indent="0" marL="0">
+            <a:pPr algn="l" marL="342900" indent="-342900">
               <a:spcAft>
                 <a:spcPts val="800"/>
               </a:spcAft>
-              <a:buNone/>
+              <a:buSzPct val="100000"/>
+              <a:buChar char="•"/>
             </a:pPr>
             <a:r>
-              <a:rPr lang="en-US" sz="4000" i="1" dirty="0">
+              <a:rPr lang="en-US" sz="4000" b="1" dirty="0">
                 <a:solidFill>
                   <a:srgbClr val="111111"/>
                 </a:solidFill>
@@ -15441,19 +15366,17 @@
                 <a:ea typeface="Times New Roman" pitchFamily="34" charset="-122"/>
                 <a:cs typeface="Times New Roman" pitchFamily="34" charset="-120"/>
               </a:rPr>
-              <a:t>The climate of the savanna has the following characteristics:</a:t>
-            </a:r>
-            <a:endParaRPr lang="en-US" sz="4000" dirty="0"/>
-          </a:p>
-          <a:p>
-            <a:pPr algn="l" indent="0" marL="0">
+              <a:t>Two seasons: </a:t>
+            </a:r>
+            <a:pPr algn="l" marL="342900" indent="-342900">
               <a:spcAft>
                 <a:spcPts val="800"/>
               </a:spcAft>
-              <a:buNone/>
+              <a:buSzPct val="100000"/>
+              <a:buChar char="•"/>
             </a:pPr>
             <a:r>
-              <a:rPr lang="en-US" sz="4000" b="1" dirty="0">
+              <a:rPr lang="en-US" sz="4000" dirty="0">
                 <a:solidFill>
                   <a:srgbClr val="111111"/>
                 </a:solidFill>
@@ -15461,16 +15384,20 @@
                 <a:ea typeface="Times New Roman" pitchFamily="34" charset="-122"/>
                 <a:cs typeface="Times New Roman" pitchFamily="34" charset="-120"/>
               </a:rPr>
-              <a:t>Temperature: </a:t>
-            </a:r>
-            <a:pPr algn="l" indent="0" marL="0">
+              <a:t>A wet season (May–October) and a dry season (November–April).</a:t>
+            </a:r>
+            <a:endParaRPr lang="en-US" sz="4000" dirty="0"/>
+          </a:p>
+          <a:p>
+            <a:pPr algn="l" marL="342900" indent="-342900">
               <a:spcAft>
                 <a:spcPts val="800"/>
               </a:spcAft>
-              <a:buNone/>
+              <a:buSzPct val="100000"/>
+              <a:buChar char="•"/>
             </a:pPr>
             <a:r>
-              <a:rPr lang="en-US" sz="4000" dirty="0">
+              <a:rPr lang="en-US" sz="4000" b="1" dirty="0">
                 <a:solidFill>
                   <a:srgbClr val="111111"/>
                 </a:solidFill>
@@ -15478,19 +15405,17 @@
                 <a:ea typeface="Times New Roman" pitchFamily="34" charset="-122"/>
                 <a:cs typeface="Times New Roman" pitchFamily="34" charset="-120"/>
               </a:rPr>
-              <a:t>It is hot all year, between about 20 °C and 33 °C.</a:t>
-            </a:r>
-            <a:endParaRPr lang="en-US" sz="4000" dirty="0"/>
-          </a:p>
-          <a:p>
-            <a:pPr algn="l" indent="0" marL="0">
+              <a:t>Rainfall: </a:t>
+            </a:r>
+            <a:pPr algn="l" marL="342900" indent="-342900">
               <a:spcAft>
                 <a:spcPts val="800"/>
               </a:spcAft>
-              <a:buNone/>
+              <a:buSzPct val="100000"/>
+              <a:buChar char="•"/>
             </a:pPr>
             <a:r>
-              <a:rPr lang="en-US" sz="4000" b="1" dirty="0">
+              <a:rPr lang="en-US" sz="4000" dirty="0">
                 <a:solidFill>
                   <a:srgbClr val="111111"/>
                 </a:solidFill>
@@ -15498,16 +15423,20 @@
                 <a:ea typeface="Times New Roman" pitchFamily="34" charset="-122"/>
                 <a:cs typeface="Times New Roman" pitchFamily="34" charset="-120"/>
               </a:rPr>
-              <a:t>Seasons: </a:t>
-            </a:r>
-            <a:pPr algn="l" indent="0" marL="0">
+              <a:t>About 750 to 1,500 mm per year.</a:t>
+            </a:r>
+            <a:endParaRPr lang="en-US" sz="4000" dirty="0"/>
+          </a:p>
+          <a:p>
+            <a:pPr algn="l" marL="342900" indent="-342900">
               <a:spcAft>
                 <a:spcPts val="800"/>
               </a:spcAft>
-              <a:buNone/>
+              <a:buSzPct val="100000"/>
+              <a:buChar char="•"/>
             </a:pPr>
             <a:r>
-              <a:rPr lang="en-US" sz="4000" dirty="0">
+              <a:rPr lang="en-US" sz="4000" b="1" dirty="0">
                 <a:solidFill>
                   <a:srgbClr val="111111"/>
                 </a:solidFill>
@@ -15515,7 +15444,25 @@
                 <a:ea typeface="Times New Roman" pitchFamily="34" charset="-122"/>
                 <a:cs typeface="Times New Roman" pitchFamily="34" charset="-120"/>
               </a:rPr>
-              <a:t>There is a wet season in summer and a dry season in winter.</a:t>
+              <a:t>Storms: </a:t>
+            </a:r>
+            <a:pPr algn="l" marL="342900" indent="-342900">
+              <a:spcAft>
+                <a:spcPts val="800"/>
+              </a:spcAft>
+              <a:buSzPct val="100000"/>
+              <a:buChar char="•"/>
+            </a:pPr>
+            <a:r>
+              <a:rPr lang="en-US" sz="4000" dirty="0">
+                <a:solidFill>
+                  <a:srgbClr val="111111"/>
+                </a:solidFill>
+                <a:latin typeface="Times New Roman" pitchFamily="34" charset="0"/>
+                <a:ea typeface="Times New Roman" pitchFamily="34" charset="-122"/>
+                <a:cs typeface="Times New Roman" pitchFamily="34" charset="-120"/>
+              </a:rPr>
+              <a:t>Rain falls as heavy storms with thunder.</a:t>
             </a:r>
             <a:endParaRPr lang="en-US" sz="4000" dirty="0"/>
           </a:p>
@@ -15633,9 +15580,111 @@
           </a:p>
         </p:txBody>
       </p:sp>
+      <p:sp>
+        <p:nvSpPr>
+          <p:cNvPr id="3" name="Text 1"/>
+          <p:cNvSpPr/>
+          <p:nvPr/>
+        </p:nvSpPr>
+        <p:spPr>
+          <a:xfrm>
+            <a:off x="365760" y="1005840"/>
+            <a:ext cx="11460175" cy="731520"/>
+          </a:xfrm>
+          <a:prstGeom prst="rect">
+            <a:avLst/>
+          </a:prstGeom>
+          <a:noFill/>
+          <a:ln/>
+        </p:spPr>
+        <p:txBody>
+          <a:bodyPr wrap="square" lIns="0" tIns="0" rIns="0" bIns="0" rtlCol="0" anchor="ctr">
+            <a:normAutofit/>
+          </a:bodyPr>
+          <a:lstStyle/>
+          <a:p>
+            <a:pPr algn="ctr" indent="0" marL="0">
+              <a:buNone/>
+            </a:pPr>
+            <a:r>
+              <a:rPr lang="en-US" sz="3600" b="1" dirty="0">
+                <a:solidFill>
+                  <a:srgbClr val="990011"/>
+                </a:solidFill>
+                <a:latin typeface="Times New Roman" pitchFamily="34" charset="0"/>
+                <a:ea typeface="Times New Roman" pitchFamily="34" charset="-122"/>
+                <a:cs typeface="Times New Roman" pitchFamily="34" charset="-120"/>
+              </a:rPr>
+              <a:t>2. Characteristics of the Climate</a:t>
+            </a:r>
+            <a:endParaRPr lang="en-US" sz="3600" dirty="0"/>
+          </a:p>
+        </p:txBody>
+      </p:sp>
+      <p:sp>
+        <p:nvSpPr>
+          <p:cNvPr id="4" name="Text 2"/>
+          <p:cNvSpPr/>
+          <p:nvPr/>
+        </p:nvSpPr>
+        <p:spPr>
+          <a:xfrm>
+            <a:off x="365760" y="1783080"/>
+            <a:ext cx="4846320" cy="4617720"/>
+          </a:xfrm>
+          <a:prstGeom prst="rect">
+            <a:avLst/>
+          </a:prstGeom>
+          <a:noFill/>
+          <a:ln/>
+        </p:spPr>
+        <p:txBody>
+          <a:bodyPr wrap="square" lIns="0" tIns="0" rIns="0" bIns="0" rtlCol="0" anchor="t"/>
+          <a:lstStyle/>
+          <a:p>
+            <a:pPr algn="l" marL="342900" indent="-342900">
+              <a:spcAft>
+                <a:spcPts val="800"/>
+              </a:spcAft>
+              <a:buSzPct val="100000"/>
+              <a:buChar char="•"/>
+            </a:pPr>
+            <a:r>
+              <a:rPr lang="en-US" sz="3600" b="1" dirty="0">
+                <a:solidFill>
+                  <a:srgbClr val="111111"/>
+                </a:solidFill>
+                <a:latin typeface="Times New Roman" pitchFamily="34" charset="0"/>
+                <a:ea typeface="Times New Roman" pitchFamily="34" charset="-122"/>
+                <a:cs typeface="Times New Roman" pitchFamily="34" charset="-120"/>
+              </a:rPr>
+              <a:t>Harmattan: </a:t>
+            </a:r>
+            <a:pPr algn="l" marL="342900" indent="-342900">
+              <a:spcAft>
+                <a:spcPts val="800"/>
+              </a:spcAft>
+              <a:buSzPct val="100000"/>
+              <a:buChar char="•"/>
+            </a:pPr>
+            <a:r>
+              <a:rPr lang="en-US" sz="3600" dirty="0">
+                <a:solidFill>
+                  <a:srgbClr val="111111"/>
+                </a:solidFill>
+                <a:latin typeface="Times New Roman" pitchFamily="34" charset="0"/>
+                <a:ea typeface="Times New Roman" pitchFamily="34" charset="-122"/>
+                <a:cs typeface="Times New Roman" pitchFamily="34" charset="-120"/>
+              </a:rPr>
+              <a:t>A dry, dusty wind blows in the dry season.</a:t>
+            </a:r>
+            <a:endParaRPr lang="en-US" sz="3600" dirty="0"/>
+          </a:p>
+        </p:txBody>
+      </p:sp>
       <p:pic>
         <p:nvPicPr>
-          <p:cNvPr id="3" name="Image 0" descr="/home/claude/f4/img/minesec_sheet.png">    </p:cNvPr>
+          <p:cNvPr id="5" name="Image 0" descr="/home/claude/f4/img/v2/f2t_harmattan.jpg">    </p:cNvPr>
           <p:cNvPicPr>
             <a:picLocks noChangeAspect="1"/>
           </p:cNvPicPr>
@@ -15649,8 +15698,8 @@
         </p:blipFill>
         <p:spPr>
           <a:xfrm>
-            <a:off x="0" y="658368"/>
-            <a:ext cx="5120640" cy="5833872"/>
+            <a:off x="5349240" y="2071212"/>
+            <a:ext cx="6659575" cy="3693983"/>
           </a:xfrm>
           <a:prstGeom prst="rect">
             <a:avLst/>
@@ -15659,14 +15708,14 @@
       </p:pic>
       <p:sp>
         <p:nvSpPr>
-          <p:cNvPr id="4" name="Text 1"/>
+          <p:cNvPr id="6" name="Text 3"/>
           <p:cNvSpPr/>
           <p:nvPr/>
         </p:nvSpPr>
         <p:spPr>
           <a:xfrm>
-            <a:off x="5349240" y="1005840"/>
-            <a:ext cx="6522415" cy="731520"/>
+            <a:off x="5349240" y="6089904"/>
+            <a:ext cx="6659575" cy="347472"/>
           </a:xfrm>
           <a:prstGeom prst="rect">
             <a:avLst/>
@@ -15675,122 +15724,24 @@
           <a:ln/>
         </p:spPr>
         <p:txBody>
-          <a:bodyPr wrap="square" lIns="0" tIns="0" rIns="0" bIns="0" rtlCol="0" anchor="ctr">
-            <a:normAutofit/>
-          </a:bodyPr>
+          <a:bodyPr wrap="square" lIns="0" tIns="0" rIns="0" bIns="0" rtlCol="0" anchor="ctr"/>
           <a:lstStyle/>
           <a:p>
             <a:pPr algn="ctr" indent="0" marL="0">
               <a:buNone/>
             </a:pPr>
             <a:r>
-              <a:rPr lang="en-US" sz="3600" b="1" dirty="0">
-                <a:solidFill>
-                  <a:srgbClr val="990011"/>
+              <a:rPr lang="en-US" sz="1600" i="1" dirty="0">
+                <a:solidFill>
+                  <a:srgbClr val="555555"/>
                 </a:solidFill>
                 <a:latin typeface="Times New Roman" pitchFamily="34" charset="0"/>
                 <a:ea typeface="Times New Roman" pitchFamily="34" charset="-122"/>
                 <a:cs typeface="Times New Roman" pitchFamily="34" charset="-120"/>
               </a:rPr>
-              <a:t>2. Characteristics of the Climate (continued)</a:t>
-            </a:r>
-            <a:endParaRPr lang="en-US" sz="3600" dirty="0"/>
-          </a:p>
-        </p:txBody>
-      </p:sp>
-      <p:sp>
-        <p:nvSpPr>
-          <p:cNvPr id="5" name="Text 2"/>
-          <p:cNvSpPr/>
-          <p:nvPr/>
-        </p:nvSpPr>
-        <p:spPr>
-          <a:xfrm>
-            <a:off x="5349240" y="1783080"/>
-            <a:ext cx="6522415" cy="4663440"/>
-          </a:xfrm>
-          <a:prstGeom prst="rect">
-            <a:avLst/>
-          </a:prstGeom>
-          <a:noFill/>
-          <a:ln/>
-        </p:spPr>
-        <p:txBody>
-          <a:bodyPr wrap="square" lIns="0" tIns="0" rIns="0" bIns="0" rtlCol="0" anchor="t"/>
-          <a:lstStyle/>
-          <a:p>
-            <a:pPr algn="l" indent="0" marL="0">
-              <a:spcAft>
-                <a:spcPts val="800"/>
-              </a:spcAft>
-              <a:buNone/>
-            </a:pPr>
-            <a:r>
-              <a:rPr lang="en-US" sz="4000" b="1" dirty="0">
-                <a:solidFill>
-                  <a:srgbClr val="111111"/>
-                </a:solidFill>
-                <a:latin typeface="Times New Roman" pitchFamily="34" charset="0"/>
-                <a:ea typeface="Times New Roman" pitchFamily="34" charset="-122"/>
-                <a:cs typeface="Times New Roman" pitchFamily="34" charset="-120"/>
-              </a:rPr>
-              <a:t>Rainfall: </a:t>
-            </a:r>
-            <a:pPr algn="l" indent="0" marL="0">
-              <a:spcAft>
-                <a:spcPts val="800"/>
-              </a:spcAft>
-              <a:buNone/>
-            </a:pPr>
-            <a:r>
-              <a:rPr lang="en-US" sz="4000" dirty="0">
-                <a:solidFill>
-                  <a:srgbClr val="111111"/>
-                </a:solidFill>
-                <a:latin typeface="Times New Roman" pitchFamily="34" charset="0"/>
-                <a:ea typeface="Times New Roman" pitchFamily="34" charset="-122"/>
-                <a:cs typeface="Times New Roman" pitchFamily="34" charset="-120"/>
-              </a:rPr>
-              <a:t>The total rainfall is between 500 mm and 1,500 mm per year.</a:t>
-            </a:r>
-            <a:endParaRPr lang="en-US" sz="4000" dirty="0"/>
-          </a:p>
-          <a:p>
-            <a:pPr algn="l" indent="0" marL="0">
-              <a:spcAft>
-                <a:spcPts val="800"/>
-              </a:spcAft>
-              <a:buNone/>
-            </a:pPr>
-            <a:r>
-              <a:rPr lang="en-US" sz="4000" b="1" dirty="0">
-                <a:solidFill>
-                  <a:srgbClr val="111111"/>
-                </a:solidFill>
-                <a:latin typeface="Times New Roman" pitchFamily="34" charset="0"/>
-                <a:ea typeface="Times New Roman" pitchFamily="34" charset="-122"/>
-                <a:cs typeface="Times New Roman" pitchFamily="34" charset="-120"/>
-              </a:rPr>
-              <a:t>Winds: </a:t>
-            </a:r>
-            <a:pPr algn="l" indent="0" marL="0">
-              <a:spcAft>
-                <a:spcPts val="800"/>
-              </a:spcAft>
-              <a:buNone/>
-            </a:pPr>
-            <a:r>
-              <a:rPr lang="en-US" sz="4000" dirty="0">
-                <a:solidFill>
-                  <a:srgbClr val="111111"/>
-                </a:solidFill>
-                <a:latin typeface="Times New Roman" pitchFamily="34" charset="0"/>
-                <a:ea typeface="Times New Roman" pitchFamily="34" charset="-122"/>
-                <a:cs typeface="Times New Roman" pitchFamily="34" charset="-120"/>
-              </a:rPr>
-              <a:t>The dry and dusty Harmattan blows from the Sahara in the dry season.</a:t>
-            </a:r>
-            <a:endParaRPr lang="en-US" sz="4000" dirty="0"/>
+              <a:t>Illustration: Harmattan dust</a:t>
+            </a:r>
+            <a:endParaRPr lang="en-US" sz="1600" dirty="0"/>
           </a:p>
         </p:txBody>
       </p:sp>
@@ -20250,7 +20201,7 @@
                           <a:ea typeface="Calibri" pitchFamily="34" charset="-122"/>
                           <a:cs typeface="Calibri" pitchFamily="34" charset="-120"/>
                         </a:rPr>
-                        <a:t>Meaning; Location; Characteristics of the Climate.</a:t>
+                        <a:t>DEFINITIONS; Location; Characteristics of the Climate.</a:t>
                       </a:r>
                       <a:endParaRPr lang="en-US" sz="1600" dirty="0">
                         <a:latin typeface="Calibri" charset="0"/>
@@ -21114,7 +21065,7 @@
                 <a:ea typeface="Calibri" pitchFamily="34" charset="-122"/>
                 <a:cs typeface="Calibri" pitchFamily="34" charset="-120"/>
               </a:rPr>
-              <a:t>Without the projector (Activity 1): ask learners to describe the land between Garoua and Ngaoundéré.</a:t>
+              <a:t>Without the projector (Activity 1): describe the land around Garoua.</a:t>
             </a:r>
             <a:endParaRPr lang="en-US" sz="2000" dirty="0"/>
           </a:p>
@@ -21135,7 +21086,7 @@
                 <a:ea typeface="Calibri" pitchFamily="34" charset="-122"/>
                 <a:cs typeface="Calibri" pitchFamily="34" charset="-120"/>
               </a:rPr>
-              <a:t>Without the projector (Activity 2): draw the Equator and the lines 5° and 15° on the board.</a:t>
+              <a:t>Without the projector (Activity 2): draw the Equator and two lines.</a:t>
             </a:r>
             <a:endParaRPr lang="en-US" sz="2000" dirty="0"/>
           </a:p>
@@ -21156,7 +21107,7 @@
                 <a:ea typeface="Calibri" pitchFamily="34" charset="-122"/>
                 <a:cs typeface="Calibri" pitchFamily="34" charset="-120"/>
               </a:rPr>
-              <a:t>Without the projector (Activity 3): write the rainfall of Garoua month by month on the board.</a:t>
+              <a:t>Without the projector (Activity 3): write the months on the board.</a:t>
             </a:r>
             <a:endParaRPr lang="en-US" sz="2000" dirty="0"/>
           </a:p>
@@ -21177,7 +21128,28 @@
                 <a:ea typeface="Calibri" pitchFamily="34" charset="-122"/>
                 <a:cs typeface="Calibri" pitchFamily="34" charset="-120"/>
               </a:rPr>
-              <a:t>Without the projector (Activity 4): ask learners how the sky looks in December in Garoua.</a:t>
+              <a:t>Without the projector (Activity 4): describe a Harmattan morning.</a:t>
+            </a:r>
+            <a:endParaRPr lang="en-US" sz="2000" dirty="0"/>
+          </a:p>
+          <a:p>
+            <a:pPr algn="l" marL="342900" indent="-342900">
+              <a:spcAft>
+                <a:spcPts val="800"/>
+              </a:spcAft>
+              <a:buSzPct val="100000"/>
+              <a:buChar char="•"/>
+            </a:pPr>
+            <a:r>
+              <a:rPr lang="en-US" sz="2000" dirty="0">
+                <a:solidFill>
+                  <a:srgbClr val="111111"/>
+                </a:solidFill>
+                <a:latin typeface="Calibri" pitchFamily="34" charset="0"/>
+                <a:ea typeface="Calibri" pitchFamily="34" charset="-122"/>
+                <a:cs typeface="Calibri" pitchFamily="34" charset="-120"/>
+              </a:rPr>
+              <a:t>Without the projector (Activity 5): describe a storm in Garoua.</a:t>
             </a:r>
             <a:endParaRPr lang="en-US" sz="2000" dirty="0"/>
           </a:p>
@@ -21289,7 +21261,7 @@
                 <a:ea typeface="Calibri" pitchFamily="34" charset="-122"/>
                 <a:cs typeface="Calibri" pitchFamily="34" charset="-120"/>
               </a:rPr>
-              <a:t>TEACHER'S NOTE</a:t>
+              <a:t>REFERENCES</a:t>
             </a:r>
             <a:endParaRPr lang="en-US" sz="1400" dirty="0"/>
           </a:p>
@@ -21312,7 +21284,7 @@
         <p:spPr>
           <a:xfrm>
             <a:off x="0" y="658368"/>
-            <a:ext cx="5120640" cy="5833872"/>
+            <a:ext cx="3840480" cy="5833872"/>
           </a:xfrm>
           <a:prstGeom prst="rect">
             <a:avLst/>
@@ -21327,8 +21299,8 @@
         </p:nvSpPr>
         <p:spPr>
           <a:xfrm>
-            <a:off x="5349240" y="1005840"/>
-            <a:ext cx="6522415" cy="731520"/>
+            <a:off x="4069080" y="1005840"/>
+            <a:ext cx="7802575" cy="731520"/>
           </a:xfrm>
           <a:prstGeom prst="rect">
             <a:avLst/>
@@ -21354,7 +21326,7 @@
                 <a:ea typeface="Times New Roman" pitchFamily="34" charset="-122"/>
                 <a:cs typeface="Times New Roman" pitchFamily="34" charset="-120"/>
               </a:rPr>
-              <a:t>Teacher's Note (continued)</a:t>
+              <a:t>References</a:t>
             </a:r>
             <a:endParaRPr lang="en-US" sz="3600" dirty="0"/>
           </a:p>
@@ -21368,8 +21340,8 @@
         </p:nvSpPr>
         <p:spPr>
           <a:xfrm>
-            <a:off x="5349240" y="1783080"/>
-            <a:ext cx="6522415" cy="4663440"/>
+            <a:off x="4069080" y="1783080"/>
+            <a:ext cx="7802575" cy="4663440"/>
           </a:xfrm>
           <a:prstGeom prst="rect">
             <a:avLst/>
@@ -21389,7 +21361,7 @@
               <a:buChar char="•"/>
             </a:pPr>
             <a:r>
-              <a:rPr lang="en-US" sz="2000" dirty="0">
+              <a:rPr lang="en-US" sz="1800" dirty="0">
                 <a:solidFill>
                   <a:srgbClr val="111111"/>
                 </a:solidFill>
@@ -21397,9 +21369,114 @@
                 <a:ea typeface="Calibri" pitchFamily="34" charset="-122"/>
                 <a:cs typeface="Calibri" pitchFamily="34" charset="-120"/>
               </a:rPr>
-              <a:t>Without the projector (Activity 5): ask learners to describe a storm in July.</a:t>
-            </a:r>
-            <a:endParaRPr lang="en-US" sz="2000" dirty="0"/>
+              <a:t>Harmonised Progression Sheet, Economic Geography (5051), Form 2 — week 8.</a:t>
+            </a:r>
+            <a:endParaRPr lang="en-US" sz="1800" dirty="0"/>
+          </a:p>
+          <a:p>
+            <a:pPr algn="l" marL="342900" indent="-342900">
+              <a:spcAft>
+                <a:spcPts val="800"/>
+              </a:spcAft>
+              <a:buSzPct val="100000"/>
+              <a:buChar char="•"/>
+            </a:pPr>
+            <a:r>
+              <a:rPr lang="en-US" sz="1800" dirty="0">
+                <a:solidFill>
+                  <a:srgbClr val="111111"/>
+                </a:solidFill>
+                <a:latin typeface="Calibri" pitchFamily="34" charset="0"/>
+                <a:ea typeface="Calibri" pitchFamily="34" charset="-122"/>
+                <a:cs typeface="Calibri" pitchFamily="34" charset="-120"/>
+              </a:rPr>
+              <a:t>Garoua climate normals: NOAA 1961–1990 (via Wikipedia, "Garoua").</a:t>
+            </a:r>
+            <a:endParaRPr lang="en-US" sz="1800" dirty="0"/>
+          </a:p>
+          <a:p>
+            <a:pPr algn="l" marL="342900" indent="-342900">
+              <a:spcAft>
+                <a:spcPts val="800"/>
+              </a:spcAft>
+              <a:buSzPct val="100000"/>
+              <a:buChar char="•"/>
+            </a:pPr>
+            <a:r>
+              <a:rPr lang="en-US" sz="1800" dirty="0">
+                <a:solidFill>
+                  <a:srgbClr val="111111"/>
+                </a:solidFill>
+                <a:latin typeface="Calibri" pitchFamily="34" charset="0"/>
+                <a:ea typeface="Calibri" pitchFamily="34" charset="-122"/>
+                <a:cs typeface="Calibri" pitchFamily="34" charset="-120"/>
+              </a:rPr>
+              <a:t>Photo, Activity 1: “Blue Wildebeest in the Lowveld” by Martin_Heigan, CC BY-NC-ND 2.0, via Flickr (https://www.flickr.com/photos/97303475@N00/2089079933)</a:t>
+            </a:r>
+            <a:endParaRPr lang="en-US" sz="1800" dirty="0"/>
+          </a:p>
+          <a:p>
+            <a:pPr algn="l" marL="342900" indent="-342900">
+              <a:spcAft>
+                <a:spcPts val="800"/>
+              </a:spcAft>
+              <a:buSzPct val="100000"/>
+              <a:buChar char="•"/>
+            </a:pPr>
+            <a:r>
+              <a:rPr lang="en-US" sz="1800" dirty="0">
+                <a:solidFill>
+                  <a:srgbClr val="111111"/>
+                </a:solidFill>
+                <a:latin typeface="Calibri" pitchFamily="34" charset="0"/>
+                <a:ea typeface="Calibri" pitchFamily="34" charset="-122"/>
+                <a:cs typeface="Calibri" pitchFamily="34" charset="-120"/>
+              </a:rPr>
+              <a:t>Photo, Activity 4: “Bamenda sob a poeira do Harmattan” by carlosoliveirareis, CC BY-NC-SA 2.0, via Flickr (https://www.flickr.com/photos/54218923@N00/387054136)</a:t>
+            </a:r>
+            <a:endParaRPr lang="en-US" sz="1800" dirty="0"/>
+          </a:p>
+          <a:p>
+            <a:pPr algn="l" marL="342900" indent="-342900">
+              <a:spcAft>
+                <a:spcPts val="800"/>
+              </a:spcAft>
+              <a:buSzPct val="100000"/>
+              <a:buChar char="•"/>
+            </a:pPr>
+            <a:r>
+              <a:rPr lang="en-US" sz="1800" dirty="0">
+                <a:solidFill>
+                  <a:srgbClr val="111111"/>
+                </a:solidFill>
+                <a:latin typeface="Calibri" pitchFamily="34" charset="0"/>
+                <a:ea typeface="Calibri" pitchFamily="34" charset="-122"/>
+                <a:cs typeface="Calibri" pitchFamily="34" charset="-120"/>
+              </a:rPr>
+              <a:t>Photo, Activity 5: “When it rains in Africa!” by Martin_Heigan, CC BY-NC-ND 2.0, via Flickr (https://www.flickr.com/photos/97303475@N00/31286250004)</a:t>
+            </a:r>
+            <a:endParaRPr lang="en-US" sz="1800" dirty="0"/>
+          </a:p>
+          <a:p>
+            <a:pPr algn="l" marL="342900" indent="-342900">
+              <a:spcAft>
+                <a:spcPts val="800"/>
+              </a:spcAft>
+              <a:buSzPct val="100000"/>
+              <a:buChar char="•"/>
+            </a:pPr>
+            <a:r>
+              <a:rPr lang="en-US" sz="1800" dirty="0">
+                <a:solidFill>
+                  <a:srgbClr val="111111"/>
+                </a:solidFill>
+                <a:latin typeface="Calibri" pitchFamily="34" charset="0"/>
+                <a:ea typeface="Calibri" pitchFamily="34" charset="-122"/>
+                <a:cs typeface="Calibri" pitchFamily="34" charset="-120"/>
+              </a:rPr>
+              <a:t>Diagrams and animations: drawn for this lesson (Geography Department).</a:t>
+            </a:r>
+            <a:endParaRPr lang="en-US" sz="1800" dirty="0"/>
           </a:p>
         </p:txBody>
       </p:sp>
@@ -21446,331 +21523,6 @@
             <a:fld id="{F7021451-1387-4CA6-816F-3879F97B5CBC}" type="slidenum">
               <a:rPr b="1" lang="en-US"/>
               <a:t>54</a:t>
-            </a:fld>
-            <a:endParaRPr lang="en-US"/>
-          </a:p>
-        </p:txBody>
-      </p:sp>
-    </p:spTree>
-  </p:cSld>
-  <p:clrMapOvr>
-    <a:masterClrMapping/>
-  </p:clrMapOvr>
-</p:sld>
-</file>
-
-<file path=ppt/slides/slide55.xml><?xml version="1.0" encoding="utf-8"?>
-<p:sld xmlns:a="http://schemas.openxmlformats.org/drawingml/2006/main" xmlns:r="http://schemas.openxmlformats.org/officeDocument/2006/relationships" xmlns:p="http://schemas.openxmlformats.org/presentationml/2006/main">
-  <p:cSld name="Slide 55">
-    <p:spTree>
-      <p:nvGrpSpPr>
-        <p:cNvPr id="1" name=""/>
-        <p:cNvGrpSpPr/>
-        <p:nvPr/>
-      </p:nvGrpSpPr>
-      <p:grpSpPr>
-        <a:xfrm>
-          <a:off x="0" y="0"/>
-          <a:ext cx="0" cy="0"/>
-          <a:chOff x="0" y="0"/>
-          <a:chExt cx="0" cy="0"/>
-        </a:xfrm>
-      </p:grpSpPr>
-      <p:sp>
-        <p:nvSpPr>
-          <p:cNvPr id="2" name="Text 0"/>
-          <p:cNvSpPr/>
-          <p:nvPr/>
-        </p:nvSpPr>
-        <p:spPr>
-          <a:xfrm>
-            <a:off x="457200" y="713232"/>
-            <a:ext cx="11368735" cy="274320"/>
-          </a:xfrm>
-          <a:prstGeom prst="rect">
-            <a:avLst/>
-          </a:prstGeom>
-          <a:noFill/>
-          <a:ln/>
-        </p:spPr>
-        <p:txBody>
-          <a:bodyPr wrap="square" lIns="0" tIns="0" rIns="0" bIns="0" rtlCol="0" anchor="ctr"/>
-          <a:lstStyle/>
-          <a:p>
-            <a:pPr algn="r" indent="0" marL="0">
-              <a:buNone/>
-            </a:pPr>
-            <a:r>
-              <a:rPr lang="en-US" sz="1400" b="1" dirty="0">
-                <a:solidFill>
-                  <a:srgbClr val="1C3F6E"/>
-                </a:solidFill>
-                <a:latin typeface="Calibri" pitchFamily="34" charset="0"/>
-                <a:ea typeface="Calibri" pitchFamily="34" charset="-122"/>
-                <a:cs typeface="Calibri" pitchFamily="34" charset="-120"/>
-              </a:rPr>
-              <a:t>REFERENCES</a:t>
-            </a:r>
-            <a:endParaRPr lang="en-US" sz="1400" dirty="0"/>
-          </a:p>
-        </p:txBody>
-      </p:sp>
-      <p:pic>
-        <p:nvPicPr>
-          <p:cNvPr id="3" name="Image 0" descr="/home/claude/f4/img/minesec_sheet.png">    </p:cNvPr>
-          <p:cNvPicPr>
-            <a:picLocks noChangeAspect="1"/>
-          </p:cNvPicPr>
-          <p:nvPr/>
-        </p:nvPicPr>
-        <p:blipFill>
-          <a:blip r:embed="rId1"/>
-          <a:stretch>
-            <a:fillRect/>
-          </a:stretch>
-        </p:blipFill>
-        <p:spPr>
-          <a:xfrm>
-            <a:off x="0" y="658368"/>
-            <a:ext cx="3840480" cy="5833872"/>
-          </a:xfrm>
-          <a:prstGeom prst="rect">
-            <a:avLst/>
-          </a:prstGeom>
-        </p:spPr>
-      </p:pic>
-      <p:sp>
-        <p:nvSpPr>
-          <p:cNvPr id="4" name="Text 1"/>
-          <p:cNvSpPr/>
-          <p:nvPr/>
-        </p:nvSpPr>
-        <p:spPr>
-          <a:xfrm>
-            <a:off x="4069080" y="1005840"/>
-            <a:ext cx="7802575" cy="731520"/>
-          </a:xfrm>
-          <a:prstGeom prst="rect">
-            <a:avLst/>
-          </a:prstGeom>
-          <a:noFill/>
-          <a:ln/>
-        </p:spPr>
-        <p:txBody>
-          <a:bodyPr wrap="square" lIns="0" tIns="0" rIns="0" bIns="0" rtlCol="0" anchor="ctr">
-            <a:normAutofit/>
-          </a:bodyPr>
-          <a:lstStyle/>
-          <a:p>
-            <a:pPr algn="ctr" indent="0" marL="0">
-              <a:buNone/>
-            </a:pPr>
-            <a:r>
-              <a:rPr lang="en-US" sz="3600" b="1" dirty="0">
-                <a:solidFill>
-                  <a:srgbClr val="990011"/>
-                </a:solidFill>
-                <a:latin typeface="Times New Roman" pitchFamily="34" charset="0"/>
-                <a:ea typeface="Times New Roman" pitchFamily="34" charset="-122"/>
-                <a:cs typeface="Times New Roman" pitchFamily="34" charset="-120"/>
-              </a:rPr>
-              <a:t>References</a:t>
-            </a:r>
-            <a:endParaRPr lang="en-US" sz="3600" dirty="0"/>
-          </a:p>
-        </p:txBody>
-      </p:sp>
-      <p:sp>
-        <p:nvSpPr>
-          <p:cNvPr id="5" name="Text 2"/>
-          <p:cNvSpPr/>
-          <p:nvPr/>
-        </p:nvSpPr>
-        <p:spPr>
-          <a:xfrm>
-            <a:off x="4069080" y="1783080"/>
-            <a:ext cx="7802575" cy="4663440"/>
-          </a:xfrm>
-          <a:prstGeom prst="rect">
-            <a:avLst/>
-          </a:prstGeom>
-          <a:noFill/>
-          <a:ln/>
-        </p:spPr>
-        <p:txBody>
-          <a:bodyPr wrap="square" lIns="0" tIns="0" rIns="0" bIns="0" rtlCol="0" anchor="t"/>
-          <a:lstStyle/>
-          <a:p>
-            <a:pPr algn="l" marL="342900" indent="-342900">
-              <a:spcAft>
-                <a:spcPts val="800"/>
-              </a:spcAft>
-              <a:buSzPct val="100000"/>
-              <a:buChar char="•"/>
-            </a:pPr>
-            <a:r>
-              <a:rPr lang="en-US" sz="1800" dirty="0">
-                <a:solidFill>
-                  <a:srgbClr val="111111"/>
-                </a:solidFill>
-                <a:latin typeface="Calibri" pitchFamily="34" charset="0"/>
-                <a:ea typeface="Calibri" pitchFamily="34" charset="-122"/>
-                <a:cs typeface="Calibri" pitchFamily="34" charset="-120"/>
-              </a:rPr>
-              <a:t>Harmonised Progression Sheet, Economic Geography (5051), Form 2 — week 8.</a:t>
-            </a:r>
-            <a:endParaRPr lang="en-US" sz="1800" dirty="0"/>
-          </a:p>
-          <a:p>
-            <a:pPr algn="l" marL="342900" indent="-342900">
-              <a:spcAft>
-                <a:spcPts val="800"/>
-              </a:spcAft>
-              <a:buSzPct val="100000"/>
-              <a:buChar char="•"/>
-            </a:pPr>
-            <a:r>
-              <a:rPr lang="en-US" sz="1800" dirty="0">
-                <a:solidFill>
-                  <a:srgbClr val="111111"/>
-                </a:solidFill>
-                <a:latin typeface="Calibri" pitchFamily="34" charset="0"/>
-                <a:ea typeface="Calibri" pitchFamily="34" charset="-122"/>
-                <a:cs typeface="Calibri" pitchFamily="34" charset="-120"/>
-              </a:rPr>
-              <a:t>Garoua climate normals: NOAA 1961–1990 (via Wikipedia, "Garoua").</a:t>
-            </a:r>
-            <a:endParaRPr lang="en-US" sz="1800" dirty="0"/>
-          </a:p>
-          <a:p>
-            <a:pPr algn="l" marL="342900" indent="-342900">
-              <a:spcAft>
-                <a:spcPts val="800"/>
-              </a:spcAft>
-              <a:buSzPct val="100000"/>
-              <a:buChar char="•"/>
-            </a:pPr>
-            <a:r>
-              <a:rPr lang="en-US" sz="1800" dirty="0">
-                <a:solidFill>
-                  <a:srgbClr val="111111"/>
-                </a:solidFill>
-                <a:latin typeface="Calibri" pitchFamily="34" charset="0"/>
-                <a:ea typeface="Calibri" pitchFamily="34" charset="-122"/>
-                <a:cs typeface="Calibri" pitchFamily="34" charset="-120"/>
-              </a:rPr>
-              <a:t>Photo, Activity 1: “Blue Wildebeest in the Lowveld” by Martin_Heigan, CC BY-NC-ND 2.0, via Flickr (https://www.flickr.com/photos/97303475@N00/2089079933)</a:t>
-            </a:r>
-            <a:endParaRPr lang="en-US" sz="1800" dirty="0"/>
-          </a:p>
-          <a:p>
-            <a:pPr algn="l" marL="342900" indent="-342900">
-              <a:spcAft>
-                <a:spcPts val="800"/>
-              </a:spcAft>
-              <a:buSzPct val="100000"/>
-              <a:buChar char="•"/>
-            </a:pPr>
-            <a:r>
-              <a:rPr lang="en-US" sz="1800" dirty="0">
-                <a:solidFill>
-                  <a:srgbClr val="111111"/>
-                </a:solidFill>
-                <a:latin typeface="Calibri" pitchFamily="34" charset="0"/>
-                <a:ea typeface="Calibri" pitchFamily="34" charset="-122"/>
-                <a:cs typeface="Calibri" pitchFamily="34" charset="-120"/>
-              </a:rPr>
-              <a:t>Photo, Activity 4: “Bamenda sob a poeira do Harmattan” by carlosoliveirareis, CC BY-NC-SA 2.0, via Flickr (https://www.flickr.com/photos/54218923@N00/387054136)</a:t>
-            </a:r>
-            <a:endParaRPr lang="en-US" sz="1800" dirty="0"/>
-          </a:p>
-          <a:p>
-            <a:pPr algn="l" marL="342900" indent="-342900">
-              <a:spcAft>
-                <a:spcPts val="800"/>
-              </a:spcAft>
-              <a:buSzPct val="100000"/>
-              <a:buChar char="•"/>
-            </a:pPr>
-            <a:r>
-              <a:rPr lang="en-US" sz="1800" dirty="0">
-                <a:solidFill>
-                  <a:srgbClr val="111111"/>
-                </a:solidFill>
-                <a:latin typeface="Calibri" pitchFamily="34" charset="0"/>
-                <a:ea typeface="Calibri" pitchFamily="34" charset="-122"/>
-                <a:cs typeface="Calibri" pitchFamily="34" charset="-120"/>
-              </a:rPr>
-              <a:t>Photo, Activity 5: “When it rains in Africa!” by Martin_Heigan, CC BY-NC-ND 2.0, via Flickr (https://www.flickr.com/photos/97303475@N00/31286250004)</a:t>
-            </a:r>
-            <a:endParaRPr lang="en-US" sz="1800" dirty="0"/>
-          </a:p>
-          <a:p>
-            <a:pPr algn="l" marL="342900" indent="-342900">
-              <a:spcAft>
-                <a:spcPts val="800"/>
-              </a:spcAft>
-              <a:buSzPct val="100000"/>
-              <a:buChar char="•"/>
-            </a:pPr>
-            <a:r>
-              <a:rPr lang="en-US" sz="1800" dirty="0">
-                <a:solidFill>
-                  <a:srgbClr val="111111"/>
-                </a:solidFill>
-                <a:latin typeface="Calibri" pitchFamily="34" charset="0"/>
-                <a:ea typeface="Calibri" pitchFamily="34" charset="-122"/>
-                <a:cs typeface="Calibri" pitchFamily="34" charset="-120"/>
-              </a:rPr>
-              <a:t>Diagrams and animations: drawn for this lesson (Geography Department).</a:t>
-            </a:r>
-            <a:endParaRPr lang="en-US" sz="1800" dirty="0"/>
-          </a:p>
-        </p:txBody>
-      </p:sp>
-      <p:sp>
-        <p:nvSpPr>
-          <p:cNvPr id="25" name="Slide Number Placeholder 0"/>
-          <p:cNvSpPr>
-            <a:spLocks noGrp="1"/>
-          </p:cNvSpPr>
-          <p:nvPr>
-            <p:ph type="sldNum" sz="quarter" idx="4294967295"/>
-          </p:nvPr>
-        </p:nvSpPr>
-        <p:spPr>
-          <a:xfrm>
-            <a:off x="27432" y="91440"/>
-            <a:ext cx="585216" cy="475488"/>
-          </a:xfrm>
-          <a:prstGeom prst="rect">
-            <a:avLst/>
-          </a:prstGeom>
-          <a:extLst>
-            <a:ext uri="{C572A759-6A51-4108-AA02-DFA0A04FC94B}">
-              <ma14:wrappingTextBoxFlag xmlns:ma14="http://schemas.microsoft.com/office/mac/drawingml/2011/main" val="0"/>
-            </a:ext>
-          </a:extLst>
-        </p:spPr>
-        <p:txBody>
-          <a:bodyPr/>
-          <a:lstStyle>
-            <a:lvl1pPr>
-              <a:defRPr sz="2000">
-                <a:solidFill>
-                  <a:srgbClr val="FFFFFF"/>
-                </a:solidFill>
-                <a:latin typeface="Calibri"/>
-                <a:ea typeface="Calibri"/>
-                <a:cs typeface="Calibri"/>
-              </a:defRPr>
-            </a:lvl1pPr>
-          </a:lstStyle>
-          <a:p>
-            <a:pPr algn="ctr"/>
-            <a:fld id="{F7021451-1387-4CA6-816F-3879F97B5CBC}" type="slidenum">
-              <a:rPr b="1" lang="en-US"/>
-              <a:t>55</a:t>
             </a:fld>
             <a:endParaRPr lang="en-US"/>
           </a:p>

--- a/lecons/F2T/06_FORM2TECH_LESSON2_WEEK8_Tropical_Grassland_Climate.pptx
+++ b/lecons/F2T/06_FORM2TECH_LESSON2_WEEK8_Tropical_Grassland_Climate.pptx
@@ -3459,7 +3459,7 @@
           <a:p>
             <a:r>
               <a:rPr lang="en-US" dirty="0"/>
-              <a:t>Before we start the new lesson, let us correct the homework I gave you at the end of Lesson 1 (Part 5): The Equatorial Region: Problems Faced, Problems Caused and Attempted Solutions. The question was: Observe the vegetation around your home in Garoua. Are there tall trees growing close together, or grasses with scattered trees? Write two sentences to describe it. Take out your exercise books.</a:t>
+              <a:t>Before we start the new lesson, let us correct the homework I gave you at the end of Lesson 1 (Part 5): The Equatorial Region: Problems Faced, Problems Caused and Attempted Solutions. The question was: Name the two seasons of Garoua. Take out your exercise books.</a:t>
             </a:r>
             <a:endParaRPr lang="en-US" dirty="0"/>
           </a:p>
@@ -4251,7 +4251,7 @@
           <a:p>
             <a:r>
               <a:rPr lang="en-US" dirty="0"/>
-              <a:t>For your homework: Look at the trees and grass around your home. Which trees keep their leaves in the dry season, and which lose them? Is the grass green or dry now? Write your observations. We shall correct it at the beginning of our next lesson.</a:t>
+              <a:t>For your homework: Name two trees of the savanna. We shall correct it at the beginning of our next lesson.</a:t>
             </a:r>
             <a:endParaRPr lang="en-US" dirty="0"/>
           </a:p>
@@ -4427,7 +4427,7 @@
           <a:p>
             <a:r>
               <a:rPr lang="en-US" dirty="0"/>
-              <a:t>Here is a good answer. Around Garoua there are grasses with trees far apart (savanna), not tall trees growing close together. In the dry season the grass is dry and many trees lose their leaves. Compare it with your own answer and correct your work in red.</a:t>
+              <a:t>Here is a good answer. The wet season and the dry season. Compare it with your own answer and correct your work in red.</a:t>
             </a:r>
             <a:endParaRPr lang="en-US" dirty="0"/>
           </a:p>
@@ -15042,7 +15042,7 @@
         <p:spPr>
           <a:xfrm>
             <a:off x="0" y="658368"/>
-            <a:ext cx="1463040" cy="5833872"/>
+            <a:ext cx="5120640" cy="5833872"/>
           </a:xfrm>
           <a:prstGeom prst="rect">
             <a:avLst/>
@@ -15057,8 +15057,8 @@
         </p:nvSpPr>
         <p:spPr>
           <a:xfrm>
-            <a:off x="1691640" y="1005840"/>
-            <a:ext cx="10180015" cy="731520"/>
+            <a:off x="5349240" y="1005840"/>
+            <a:ext cx="6522415" cy="731520"/>
           </a:xfrm>
           <a:prstGeom prst="rect">
             <a:avLst/>
@@ -15098,8 +15098,8 @@
         </p:nvSpPr>
         <p:spPr>
           <a:xfrm>
-            <a:off x="1691640" y="1783080"/>
-            <a:ext cx="10180015" cy="4663440"/>
+            <a:off x="5349240" y="1783080"/>
+            <a:ext cx="6522415" cy="4663440"/>
           </a:xfrm>
           <a:prstGeom prst="rect">
             <a:avLst/>
@@ -15146,7 +15146,7 @@
                 <a:ea typeface="Times New Roman" pitchFamily="34" charset="-122"/>
                 <a:cs typeface="Times New Roman" pitchFamily="34" charset="-120"/>
               </a:rPr>
-              <a:t>Observe the vegetation around your home in Garoua. Are there tall trees growing close together, or grasses with scattered trees? Write two sentences to describe it.</a:t>
+              <a:t>Name the two seasons of Garoua.</a:t>
             </a:r>
             <a:endParaRPr lang="en-US" sz="4000" dirty="0"/>
           </a:p>
@@ -17318,7 +17318,7 @@
                 <a:ea typeface="Times New Roman" pitchFamily="34" charset="-122"/>
                 <a:cs typeface="Times New Roman" pitchFamily="34" charset="-120"/>
               </a:rPr>
-              <a:t>Look at the trees and grass around your home. Which trees keep their leaves in the dry season, and which lose them? Is the grass green or dry now? Write your observations.</a:t>
+              <a:t>Name two trees of the savanna.</a:t>
             </a:r>
             <a:endParaRPr lang="en-US" sz="4000" dirty="0"/>
           </a:p>
@@ -17776,7 +17776,7 @@
                 <a:ea typeface="Times New Roman" pitchFamily="34" charset="-122"/>
                 <a:cs typeface="Times New Roman" pitchFamily="34" charset="-120"/>
               </a:rPr>
-              <a:t>Around Garoua there are grasses with trees far apart (savanna), not tall trees growing close together. In the dry season the grass is dry and many trees lose their leaves.</a:t>
+              <a:t>The wet season and the dry season.</a:t>
             </a:r>
             <a:endParaRPr lang="en-US" sz="4000" dirty="0"/>
           </a:p>
@@ -20477,7 +20477,7 @@
                           <a:ea typeface="Calibri" pitchFamily="34" charset="-122"/>
                           <a:cs typeface="Calibri" pitchFamily="34" charset="-120"/>
                         </a:rPr>
-                        <a:t>Look at the trees and grass around your home. Which trees keep their leaves in the dry season, and which lose them? Is the grass green or dry now? Write your observations.</a:t>
+                        <a:t>Name two trees of the savanna.</a:t>
                       </a:r>
                       <a:endParaRPr lang="en-US" sz="1600" dirty="0">
                         <a:latin typeface="Calibri" charset="0"/>
